--- a/projects/cns-pharmacology-practical/slides/ch02-psychosis.pptx
+++ b/projects/cns-pharmacology-practical/slides/ch02-psychosis.pptx
@@ -7736,7 +7736,7 @@
                 </a:solidFill>
                 <a:latin typeface="Calibri"/>
               </a:rPr>
-              <a:t>45 minutes  ·  10 questions</a:t>
+              <a:t>60 minutes  ·  10 questions</a:t>
             </a:r>
           </a:p>
         </p:txBody>
@@ -14330,7 +14330,7 @@
                 </a:solidFill>
                 <a:latin typeface="Cambria"/>
               </a:rPr>
-              <a:t>45</a:t>
+              <a:t>60</a:t>
             </a:r>
           </a:p>
           <a:p>

--- a/projects/cns-pharmacology-practical/slides/ch02-psychosis.pptx
+++ b/projects/cns-pharmacology-practical/slides/ch02-psychosis.pptx
@@ -5880,14 +5880,177 @@
       </p:pic>
       <p:sp>
         <p:nvSpPr>
-          <p:cNvPr id="11" name="TextBox 10"/>
+          <p:cNvPr id="11" name="Rounded Rectangle 10"/>
+          <p:cNvSpPr/>
+          <p:nvPr/>
+        </p:nvSpPr>
+        <p:spPr>
+          <a:xfrm>
+            <a:off x="411479" y="1444752"/>
+            <a:ext cx="11368735" cy="4800600"/>
+          </a:xfrm>
+          <a:prstGeom prst="roundRect">
+            <a:avLst>
+              <a:gd name="adj" fmla="val 4000"/>
+            </a:avLst>
+          </a:prstGeom>
+          <a:solidFill>
+            <a:srgbClr val="FFFFFF">
+              <a:alpha val="84000"/>
+            </a:srgbClr>
+          </a:solidFill>
+          <a:ln w="19050">
+            <a:solidFill>
+              <a:srgbClr val="FFFFFF"/>
+            </a:solidFill>
+          </a:ln>
+          <a:effectLst>
+            <a:outerShdw blurRad="203200" dist="50800" dir="5400000" algn="t" rotWithShape="0">
+              <a:srgbClr val="1A2340">
+                <a:alpha val="20000"/>
+              </a:srgbClr>
+            </a:outerShdw>
+          </a:effectLst>
+        </p:spPr>
+        <p:style>
+          <a:lnRef idx="1">
+            <a:schemeClr val="accent1"/>
+          </a:lnRef>
+          <a:fillRef idx="3">
+            <a:schemeClr val="accent1"/>
+          </a:fillRef>
+          <a:effectRef idx="2">
+            <a:schemeClr val="accent1"/>
+          </a:effectRef>
+          <a:fontRef idx="minor">
+            <a:schemeClr val="lt1"/>
+          </a:fontRef>
+        </p:style>
+        <p:txBody>
+          <a:bodyPr rtlCol="0" anchor="ctr"/>
+          <a:lstStyle/>
+          <a:p>
+            <a:pPr algn="ctr"/>
+          </a:p>
+        </p:txBody>
+      </p:sp>
+      <p:sp>
+        <p:nvSpPr>
+          <p:cNvPr id="12" name="Rounded Rectangle 11"/>
+          <p:cNvSpPr/>
+          <p:nvPr/>
+        </p:nvSpPr>
+        <p:spPr>
+          <a:xfrm>
+            <a:off x="731519" y="1508760"/>
+            <a:ext cx="10728655" cy="32004"/>
+          </a:xfrm>
+          <a:prstGeom prst="roundRect">
+            <a:avLst>
+              <a:gd name="adj" fmla="val 50000"/>
+            </a:avLst>
+          </a:prstGeom>
+          <a:solidFill>
+            <a:srgbClr val="FFFFFF">
+              <a:alpha val="85000"/>
+            </a:srgbClr>
+          </a:solidFill>
+          <a:ln>
+            <a:noFill/>
+          </a:ln>
+          <a:effectLst/>
+        </p:spPr>
+        <p:style>
+          <a:lnRef idx="1">
+            <a:schemeClr val="accent1"/>
+          </a:lnRef>
+          <a:fillRef idx="3">
+            <a:schemeClr val="accent1"/>
+          </a:fillRef>
+          <a:effectRef idx="2">
+            <a:schemeClr val="accent1"/>
+          </a:effectRef>
+          <a:fontRef idx="minor">
+            <a:schemeClr val="lt1"/>
+          </a:fontRef>
+        </p:style>
+        <p:txBody>
+          <a:bodyPr rtlCol="0" anchor="ctr"/>
+          <a:lstStyle/>
+          <a:p>
+            <a:pPr algn="ctr"/>
+          </a:p>
+        </p:txBody>
+      </p:sp>
+      <p:sp>
+        <p:nvSpPr>
+          <p:cNvPr id="13" name="Rounded Rectangle 12"/>
+          <p:cNvSpPr/>
+          <p:nvPr/>
+        </p:nvSpPr>
+        <p:spPr>
+          <a:xfrm>
+            <a:off x="548640" y="1591056"/>
+            <a:ext cx="64008" cy="4016755"/>
+          </a:xfrm>
+          <a:prstGeom prst="roundRect">
+            <a:avLst>
+              <a:gd name="adj" fmla="val 50000"/>
+            </a:avLst>
+          </a:prstGeom>
+          <a:solidFill>
+            <a:srgbClr val="8D6A2A"/>
+          </a:solidFill>
+          <a:ln>
+            <a:noFill/>
+          </a:ln>
+          <a:effectLst>
+            <a:outerShdw blurRad="203200" dist="50800" dir="5400000" algn="t" rotWithShape="0">
+              <a:srgbClr val="1A2340">
+                <a:alpha val="20000"/>
+              </a:srgbClr>
+            </a:outerShdw>
+          </a:effectLst>
+          <a:scene3d>
+            <a:camera prst="orthographicFront"/>
+            <a:lightRig rig="threePt" dir="t"/>
+          </a:scene3d>
+          <a:sp3d>
+            <a:bevelT w="44450" h="25400" prst="softRound"/>
+          </a:sp3d>
+        </p:spPr>
+        <p:style>
+          <a:lnRef idx="1">
+            <a:schemeClr val="accent1"/>
+          </a:lnRef>
+          <a:fillRef idx="3">
+            <a:schemeClr val="accent1"/>
+          </a:fillRef>
+          <a:effectRef idx="2">
+            <a:schemeClr val="accent1"/>
+          </a:effectRef>
+          <a:fontRef idx="minor">
+            <a:schemeClr val="lt1"/>
+          </a:fontRef>
+        </p:style>
+        <p:txBody>
+          <a:bodyPr rtlCol="0" anchor="ctr"/>
+          <a:lstStyle/>
+          <a:p>
+            <a:pPr algn="ctr"/>
+          </a:p>
+        </p:txBody>
+      </p:sp>
+      <p:sp>
+        <p:nvSpPr>
+          <p:cNvPr id="14" name="TextBox 13"/>
           <p:cNvSpPr txBox="1"/>
           <p:nvPr/>
         </p:nvSpPr>
         <p:spPr>
           <a:xfrm>
-            <a:off x="548640" y="1554480"/>
-            <a:ext cx="4480560" cy="4617720"/>
+            <a:off x="777240" y="1554480"/>
+            <a:ext cx="4251960" cy="4617720"/>
           </a:xfrm>
           <a:prstGeom prst="rect">
             <a:avLst/>
@@ -5978,7 +6141,7 @@
       </p:sp>
       <p:sp>
         <p:nvSpPr>
-          <p:cNvPr id="12" name="Oval 11"/>
+          <p:cNvPr id="15" name="Oval 14"/>
           <p:cNvSpPr/>
           <p:nvPr/>
         </p:nvSpPr>
@@ -6031,7 +6194,7 @@
       </p:sp>
       <p:sp>
         <p:nvSpPr>
-          <p:cNvPr id="13" name="TextBox 12"/>
+          <p:cNvPr id="16" name="TextBox 15"/>
           <p:cNvSpPr txBox="1"/>
           <p:nvPr/>
         </p:nvSpPr>
@@ -6074,7 +6237,7 @@
       </p:sp>
       <p:sp>
         <p:nvSpPr>
-          <p:cNvPr id="14" name="Oval 13"/>
+          <p:cNvPr id="17" name="Oval 16"/>
           <p:cNvSpPr/>
           <p:nvPr/>
         </p:nvSpPr>
@@ -6127,7 +6290,7 @@
       </p:sp>
       <p:sp>
         <p:nvSpPr>
-          <p:cNvPr id="15" name="TextBox 14"/>
+          <p:cNvPr id="18" name="TextBox 17"/>
           <p:cNvSpPr txBox="1"/>
           <p:nvPr/>
         </p:nvSpPr>
@@ -6161,7 +6324,7 @@
       </p:sp>
       <p:sp>
         <p:nvSpPr>
-          <p:cNvPr id="16" name="Oval 15"/>
+          <p:cNvPr id="19" name="Oval 18"/>
           <p:cNvSpPr/>
           <p:nvPr/>
         </p:nvSpPr>
@@ -6214,7 +6377,7 @@
       </p:sp>
       <p:sp>
         <p:nvSpPr>
-          <p:cNvPr id="17" name="TextBox 16"/>
+          <p:cNvPr id="20" name="TextBox 19"/>
           <p:cNvSpPr txBox="1"/>
           <p:nvPr/>
         </p:nvSpPr>
@@ -6248,7 +6411,7 @@
       </p:sp>
       <p:sp>
         <p:nvSpPr>
-          <p:cNvPr id="18" name="Oval 17"/>
+          <p:cNvPr id="21" name="Oval 20"/>
           <p:cNvSpPr/>
           <p:nvPr/>
         </p:nvSpPr>
@@ -6301,7 +6464,7 @@
       </p:sp>
       <p:sp>
         <p:nvSpPr>
-          <p:cNvPr id="19" name="TextBox 18"/>
+          <p:cNvPr id="22" name="TextBox 21"/>
           <p:cNvSpPr txBox="1"/>
           <p:nvPr/>
         </p:nvSpPr>
@@ -6335,7 +6498,7 @@
       </p:sp>
       <p:sp>
         <p:nvSpPr>
-          <p:cNvPr id="20" name="Oval 19"/>
+          <p:cNvPr id="23" name="Oval 22"/>
           <p:cNvSpPr/>
           <p:nvPr/>
         </p:nvSpPr>
@@ -6388,7 +6551,7 @@
       </p:sp>
       <p:sp>
         <p:nvSpPr>
-          <p:cNvPr id="21" name="TextBox 20"/>
+          <p:cNvPr id="24" name="TextBox 23"/>
           <p:cNvSpPr txBox="1"/>
           <p:nvPr/>
         </p:nvSpPr>
@@ -6803,14 +6966,177 @@
       </p:pic>
       <p:sp>
         <p:nvSpPr>
-          <p:cNvPr id="11" name="TextBox 10"/>
+          <p:cNvPr id="11" name="Rounded Rectangle 10"/>
+          <p:cNvSpPr/>
+          <p:nvPr/>
+        </p:nvSpPr>
+        <p:spPr>
+          <a:xfrm>
+            <a:off x="411479" y="1444752"/>
+            <a:ext cx="11368735" cy="4800600"/>
+          </a:xfrm>
+          <a:prstGeom prst="roundRect">
+            <a:avLst>
+              <a:gd name="adj" fmla="val 4000"/>
+            </a:avLst>
+          </a:prstGeom>
+          <a:solidFill>
+            <a:srgbClr val="FFFFFF">
+              <a:alpha val="84000"/>
+            </a:srgbClr>
+          </a:solidFill>
+          <a:ln w="19050">
+            <a:solidFill>
+              <a:srgbClr val="FFFFFF"/>
+            </a:solidFill>
+          </a:ln>
+          <a:effectLst>
+            <a:outerShdw blurRad="203200" dist="50800" dir="5400000" algn="t" rotWithShape="0">
+              <a:srgbClr val="1A2340">
+                <a:alpha val="20000"/>
+              </a:srgbClr>
+            </a:outerShdw>
+          </a:effectLst>
+        </p:spPr>
+        <p:style>
+          <a:lnRef idx="1">
+            <a:schemeClr val="accent1"/>
+          </a:lnRef>
+          <a:fillRef idx="3">
+            <a:schemeClr val="accent1"/>
+          </a:fillRef>
+          <a:effectRef idx="2">
+            <a:schemeClr val="accent1"/>
+          </a:effectRef>
+          <a:fontRef idx="minor">
+            <a:schemeClr val="lt1"/>
+          </a:fontRef>
+        </p:style>
+        <p:txBody>
+          <a:bodyPr rtlCol="0" anchor="ctr"/>
+          <a:lstStyle/>
+          <a:p>
+            <a:pPr algn="ctr"/>
+          </a:p>
+        </p:txBody>
+      </p:sp>
+      <p:sp>
+        <p:nvSpPr>
+          <p:cNvPr id="12" name="Rounded Rectangle 11"/>
+          <p:cNvSpPr/>
+          <p:nvPr/>
+        </p:nvSpPr>
+        <p:spPr>
+          <a:xfrm>
+            <a:off x="731519" y="1508760"/>
+            <a:ext cx="10728655" cy="32004"/>
+          </a:xfrm>
+          <a:prstGeom prst="roundRect">
+            <a:avLst>
+              <a:gd name="adj" fmla="val 50000"/>
+            </a:avLst>
+          </a:prstGeom>
+          <a:solidFill>
+            <a:srgbClr val="FFFFFF">
+              <a:alpha val="85000"/>
+            </a:srgbClr>
+          </a:solidFill>
+          <a:ln>
+            <a:noFill/>
+          </a:ln>
+          <a:effectLst/>
+        </p:spPr>
+        <p:style>
+          <a:lnRef idx="1">
+            <a:schemeClr val="accent1"/>
+          </a:lnRef>
+          <a:fillRef idx="3">
+            <a:schemeClr val="accent1"/>
+          </a:fillRef>
+          <a:effectRef idx="2">
+            <a:schemeClr val="accent1"/>
+          </a:effectRef>
+          <a:fontRef idx="minor">
+            <a:schemeClr val="lt1"/>
+          </a:fontRef>
+        </p:style>
+        <p:txBody>
+          <a:bodyPr rtlCol="0" anchor="ctr"/>
+          <a:lstStyle/>
+          <a:p>
+            <a:pPr algn="ctr"/>
+          </a:p>
+        </p:txBody>
+      </p:sp>
+      <p:sp>
+        <p:nvSpPr>
+          <p:cNvPr id="13" name="Rounded Rectangle 12"/>
+          <p:cNvSpPr/>
+          <p:nvPr/>
+        </p:nvSpPr>
+        <p:spPr>
+          <a:xfrm>
+            <a:off x="548640" y="1591056"/>
+            <a:ext cx="64008" cy="4016756"/>
+          </a:xfrm>
+          <a:prstGeom prst="roundRect">
+            <a:avLst>
+              <a:gd name="adj" fmla="val 50000"/>
+            </a:avLst>
+          </a:prstGeom>
+          <a:solidFill>
+            <a:srgbClr val="8D6A2A"/>
+          </a:solidFill>
+          <a:ln>
+            <a:noFill/>
+          </a:ln>
+          <a:effectLst>
+            <a:outerShdw blurRad="203200" dist="50800" dir="5400000" algn="t" rotWithShape="0">
+              <a:srgbClr val="1A2340">
+                <a:alpha val="20000"/>
+              </a:srgbClr>
+            </a:outerShdw>
+          </a:effectLst>
+          <a:scene3d>
+            <a:camera prst="orthographicFront"/>
+            <a:lightRig rig="threePt" dir="t"/>
+          </a:scene3d>
+          <a:sp3d>
+            <a:bevelT w="44450" h="25400" prst="softRound"/>
+          </a:sp3d>
+        </p:spPr>
+        <p:style>
+          <a:lnRef idx="1">
+            <a:schemeClr val="accent1"/>
+          </a:lnRef>
+          <a:fillRef idx="3">
+            <a:schemeClr val="accent1"/>
+          </a:fillRef>
+          <a:effectRef idx="2">
+            <a:schemeClr val="accent1"/>
+          </a:effectRef>
+          <a:fontRef idx="minor">
+            <a:schemeClr val="lt1"/>
+          </a:fontRef>
+        </p:style>
+        <p:txBody>
+          <a:bodyPr rtlCol="0" anchor="ctr"/>
+          <a:lstStyle/>
+          <a:p>
+            <a:pPr algn="ctr"/>
+          </a:p>
+        </p:txBody>
+      </p:sp>
+      <p:sp>
+        <p:nvSpPr>
+          <p:cNvPr id="14" name="TextBox 13"/>
           <p:cNvSpPr txBox="1"/>
           <p:nvPr/>
         </p:nvSpPr>
         <p:spPr>
           <a:xfrm>
-            <a:off x="548640" y="1554480"/>
-            <a:ext cx="4480560" cy="4617720"/>
+            <a:off x="777240" y="1554480"/>
+            <a:ext cx="4251960" cy="4617720"/>
           </a:xfrm>
           <a:prstGeom prst="rect">
             <a:avLst/>
@@ -6883,7 +7209,7 @@
       </p:sp>
       <p:sp>
         <p:nvSpPr>
-          <p:cNvPr id="12" name="Oval 11"/>
+          <p:cNvPr id="15" name="Oval 14"/>
           <p:cNvSpPr/>
           <p:nvPr/>
         </p:nvSpPr>
@@ -6936,7 +7262,7 @@
       </p:sp>
       <p:sp>
         <p:nvSpPr>
-          <p:cNvPr id="13" name="TextBox 12"/>
+          <p:cNvPr id="16" name="TextBox 15"/>
           <p:cNvSpPr txBox="1"/>
           <p:nvPr/>
         </p:nvSpPr>
@@ -6970,7 +7296,7 @@
       </p:sp>
       <p:sp>
         <p:nvSpPr>
-          <p:cNvPr id="14" name="Oval 13"/>
+          <p:cNvPr id="17" name="Oval 16"/>
           <p:cNvSpPr/>
           <p:nvPr/>
         </p:nvSpPr>
@@ -7023,7 +7349,7 @@
       </p:sp>
       <p:sp>
         <p:nvSpPr>
-          <p:cNvPr id="15" name="TextBox 14"/>
+          <p:cNvPr id="18" name="TextBox 17"/>
           <p:cNvSpPr txBox="1"/>
           <p:nvPr/>
         </p:nvSpPr>
@@ -7057,7 +7383,7 @@
       </p:sp>
       <p:sp>
         <p:nvSpPr>
-          <p:cNvPr id="16" name="Oval 15"/>
+          <p:cNvPr id="19" name="Oval 18"/>
           <p:cNvSpPr/>
           <p:nvPr/>
         </p:nvSpPr>
@@ -7110,7 +7436,7 @@
       </p:sp>
       <p:sp>
         <p:nvSpPr>
-          <p:cNvPr id="17" name="TextBox 16"/>
+          <p:cNvPr id="20" name="TextBox 19"/>
           <p:cNvSpPr txBox="1"/>
           <p:nvPr/>
         </p:nvSpPr>
@@ -7525,14 +7851,177 @@
       </p:pic>
       <p:sp>
         <p:nvSpPr>
-          <p:cNvPr id="11" name="TextBox 10"/>
+          <p:cNvPr id="11" name="Rounded Rectangle 10"/>
+          <p:cNvSpPr/>
+          <p:nvPr/>
+        </p:nvSpPr>
+        <p:spPr>
+          <a:xfrm>
+            <a:off x="411479" y="1444752"/>
+            <a:ext cx="11368735" cy="4800600"/>
+          </a:xfrm>
+          <a:prstGeom prst="roundRect">
+            <a:avLst>
+              <a:gd name="adj" fmla="val 4000"/>
+            </a:avLst>
+          </a:prstGeom>
+          <a:solidFill>
+            <a:srgbClr val="FFFFFF">
+              <a:alpha val="84000"/>
+            </a:srgbClr>
+          </a:solidFill>
+          <a:ln w="19050">
+            <a:solidFill>
+              <a:srgbClr val="FFFFFF"/>
+            </a:solidFill>
+          </a:ln>
+          <a:effectLst>
+            <a:outerShdw blurRad="203200" dist="50800" dir="5400000" algn="t" rotWithShape="0">
+              <a:srgbClr val="1A2340">
+                <a:alpha val="20000"/>
+              </a:srgbClr>
+            </a:outerShdw>
+          </a:effectLst>
+        </p:spPr>
+        <p:style>
+          <a:lnRef idx="1">
+            <a:schemeClr val="accent1"/>
+          </a:lnRef>
+          <a:fillRef idx="3">
+            <a:schemeClr val="accent1"/>
+          </a:fillRef>
+          <a:effectRef idx="2">
+            <a:schemeClr val="accent1"/>
+          </a:effectRef>
+          <a:fontRef idx="minor">
+            <a:schemeClr val="lt1"/>
+          </a:fontRef>
+        </p:style>
+        <p:txBody>
+          <a:bodyPr rtlCol="0" anchor="ctr"/>
+          <a:lstStyle/>
+          <a:p>
+            <a:pPr algn="ctr"/>
+          </a:p>
+        </p:txBody>
+      </p:sp>
+      <p:sp>
+        <p:nvSpPr>
+          <p:cNvPr id="12" name="Rounded Rectangle 11"/>
+          <p:cNvSpPr/>
+          <p:nvPr/>
+        </p:nvSpPr>
+        <p:spPr>
+          <a:xfrm>
+            <a:off x="731519" y="1508760"/>
+            <a:ext cx="10728655" cy="32004"/>
+          </a:xfrm>
+          <a:prstGeom prst="roundRect">
+            <a:avLst>
+              <a:gd name="adj" fmla="val 50000"/>
+            </a:avLst>
+          </a:prstGeom>
+          <a:solidFill>
+            <a:srgbClr val="FFFFFF">
+              <a:alpha val="85000"/>
+            </a:srgbClr>
+          </a:solidFill>
+          <a:ln>
+            <a:noFill/>
+          </a:ln>
+          <a:effectLst/>
+        </p:spPr>
+        <p:style>
+          <a:lnRef idx="1">
+            <a:schemeClr val="accent1"/>
+          </a:lnRef>
+          <a:fillRef idx="3">
+            <a:schemeClr val="accent1"/>
+          </a:fillRef>
+          <a:effectRef idx="2">
+            <a:schemeClr val="accent1"/>
+          </a:effectRef>
+          <a:fontRef idx="minor">
+            <a:schemeClr val="lt1"/>
+          </a:fontRef>
+        </p:style>
+        <p:txBody>
+          <a:bodyPr rtlCol="0" anchor="ctr"/>
+          <a:lstStyle/>
+          <a:p>
+            <a:pPr algn="ctr"/>
+          </a:p>
+        </p:txBody>
+      </p:sp>
+      <p:sp>
+        <p:nvSpPr>
+          <p:cNvPr id="13" name="Rounded Rectangle 12"/>
+          <p:cNvSpPr/>
+          <p:nvPr/>
+        </p:nvSpPr>
+        <p:spPr>
+          <a:xfrm>
+            <a:off x="548640" y="1591056"/>
+            <a:ext cx="64008" cy="873252"/>
+          </a:xfrm>
+          <a:prstGeom prst="roundRect">
+            <a:avLst>
+              <a:gd name="adj" fmla="val 50000"/>
+            </a:avLst>
+          </a:prstGeom>
+          <a:solidFill>
+            <a:srgbClr val="8D6A2A"/>
+          </a:solidFill>
+          <a:ln>
+            <a:noFill/>
+          </a:ln>
+          <a:effectLst>
+            <a:outerShdw blurRad="203200" dist="50800" dir="5400000" algn="t" rotWithShape="0">
+              <a:srgbClr val="1A2340">
+                <a:alpha val="20000"/>
+              </a:srgbClr>
+            </a:outerShdw>
+          </a:effectLst>
+          <a:scene3d>
+            <a:camera prst="orthographicFront"/>
+            <a:lightRig rig="threePt" dir="t"/>
+          </a:scene3d>
+          <a:sp3d>
+            <a:bevelT w="44450" h="25400" prst="softRound"/>
+          </a:sp3d>
+        </p:spPr>
+        <p:style>
+          <a:lnRef idx="1">
+            <a:schemeClr val="accent1"/>
+          </a:lnRef>
+          <a:fillRef idx="3">
+            <a:schemeClr val="accent1"/>
+          </a:fillRef>
+          <a:effectRef idx="2">
+            <a:schemeClr val="accent1"/>
+          </a:effectRef>
+          <a:fontRef idx="minor">
+            <a:schemeClr val="lt1"/>
+          </a:fontRef>
+        </p:style>
+        <p:txBody>
+          <a:bodyPr rtlCol="0" anchor="ctr"/>
+          <a:lstStyle/>
+          <a:p>
+            <a:pPr algn="ctr"/>
+          </a:p>
+        </p:txBody>
+      </p:sp>
+      <p:sp>
+        <p:nvSpPr>
+          <p:cNvPr id="14" name="TextBox 13"/>
           <p:cNvSpPr txBox="1"/>
           <p:nvPr/>
         </p:nvSpPr>
         <p:spPr>
           <a:xfrm>
-            <a:off x="548640" y="1554480"/>
-            <a:ext cx="11094415" cy="1092708"/>
+            <a:off x="777240" y="1554480"/>
+            <a:ext cx="10865815" cy="1092708"/>
           </a:xfrm>
           <a:prstGeom prst="rect">
             <a:avLst/>
@@ -7564,7 +8053,7 @@
       </p:sp>
       <p:graphicFrame>
         <p:nvGraphicFramePr>
-          <p:cNvPr id="12" name="Table 11"/>
+          <p:cNvPr id="15" name="Table 14"/>
           <p:cNvGraphicFramePr>
             <a:graphicFrameLocks noGrp="1"/>
           </p:cNvGraphicFramePr>
@@ -8312,7 +8801,111 @@
       </p:pic>
       <p:sp>
         <p:nvSpPr>
-          <p:cNvPr id="11" name="Oval 10"/>
+          <p:cNvPr id="11" name="Rounded Rectangle 10"/>
+          <p:cNvSpPr/>
+          <p:nvPr/>
+        </p:nvSpPr>
+        <p:spPr>
+          <a:xfrm>
+            <a:off x="411479" y="1444752"/>
+            <a:ext cx="11368735" cy="4800600"/>
+          </a:xfrm>
+          <a:prstGeom prst="roundRect">
+            <a:avLst>
+              <a:gd name="adj" fmla="val 4000"/>
+            </a:avLst>
+          </a:prstGeom>
+          <a:solidFill>
+            <a:srgbClr val="FFFFFF">
+              <a:alpha val="84000"/>
+            </a:srgbClr>
+          </a:solidFill>
+          <a:ln w="19050">
+            <a:solidFill>
+              <a:srgbClr val="FFFFFF"/>
+            </a:solidFill>
+          </a:ln>
+          <a:effectLst>
+            <a:outerShdw blurRad="203200" dist="50800" dir="5400000" algn="t" rotWithShape="0">
+              <a:srgbClr val="1A2340">
+                <a:alpha val="20000"/>
+              </a:srgbClr>
+            </a:outerShdw>
+          </a:effectLst>
+        </p:spPr>
+        <p:style>
+          <a:lnRef idx="1">
+            <a:schemeClr val="accent1"/>
+          </a:lnRef>
+          <a:fillRef idx="3">
+            <a:schemeClr val="accent1"/>
+          </a:fillRef>
+          <a:effectRef idx="2">
+            <a:schemeClr val="accent1"/>
+          </a:effectRef>
+          <a:fontRef idx="minor">
+            <a:schemeClr val="lt1"/>
+          </a:fontRef>
+        </p:style>
+        <p:txBody>
+          <a:bodyPr rtlCol="0" anchor="ctr"/>
+          <a:lstStyle/>
+          <a:p>
+            <a:pPr algn="ctr"/>
+          </a:p>
+        </p:txBody>
+      </p:sp>
+      <p:sp>
+        <p:nvSpPr>
+          <p:cNvPr id="12" name="Rounded Rectangle 11"/>
+          <p:cNvSpPr/>
+          <p:nvPr/>
+        </p:nvSpPr>
+        <p:spPr>
+          <a:xfrm>
+            <a:off x="731519" y="1508760"/>
+            <a:ext cx="10728655" cy="32004"/>
+          </a:xfrm>
+          <a:prstGeom prst="roundRect">
+            <a:avLst>
+              <a:gd name="adj" fmla="val 50000"/>
+            </a:avLst>
+          </a:prstGeom>
+          <a:solidFill>
+            <a:srgbClr val="FFFFFF">
+              <a:alpha val="85000"/>
+            </a:srgbClr>
+          </a:solidFill>
+          <a:ln>
+            <a:noFill/>
+          </a:ln>
+          <a:effectLst/>
+        </p:spPr>
+        <p:style>
+          <a:lnRef idx="1">
+            <a:schemeClr val="accent1"/>
+          </a:lnRef>
+          <a:fillRef idx="3">
+            <a:schemeClr val="accent1"/>
+          </a:fillRef>
+          <a:effectRef idx="2">
+            <a:schemeClr val="accent1"/>
+          </a:effectRef>
+          <a:fontRef idx="minor">
+            <a:schemeClr val="lt1"/>
+          </a:fontRef>
+        </p:style>
+        <p:txBody>
+          <a:bodyPr rtlCol="0" anchor="ctr"/>
+          <a:lstStyle/>
+          <a:p>
+            <a:pPr algn="ctr"/>
+          </a:p>
+        </p:txBody>
+      </p:sp>
+      <p:sp>
+        <p:nvSpPr>
+          <p:cNvPr id="13" name="Oval 12"/>
           <p:cNvSpPr/>
           <p:nvPr/>
         </p:nvSpPr>
@@ -8365,7 +8958,7 @@
       </p:sp>
       <p:sp>
         <p:nvSpPr>
-          <p:cNvPr id="12" name="TextBox 11"/>
+          <p:cNvPr id="14" name="TextBox 13"/>
           <p:cNvSpPr txBox="1"/>
           <p:nvPr/>
         </p:nvSpPr>
@@ -8408,7 +9001,7 @@
       </p:sp>
       <p:sp>
         <p:nvSpPr>
-          <p:cNvPr id="13" name="Oval 12"/>
+          <p:cNvPr id="15" name="Oval 14"/>
           <p:cNvSpPr/>
           <p:nvPr/>
         </p:nvSpPr>
@@ -8461,7 +9054,7 @@
       </p:sp>
       <p:sp>
         <p:nvSpPr>
-          <p:cNvPr id="14" name="TextBox 13"/>
+          <p:cNvPr id="16" name="TextBox 15"/>
           <p:cNvSpPr txBox="1"/>
           <p:nvPr/>
         </p:nvSpPr>
@@ -8504,7 +9097,7 @@
       </p:sp>
       <p:sp>
         <p:nvSpPr>
-          <p:cNvPr id="15" name="Oval 14"/>
+          <p:cNvPr id="17" name="Oval 16"/>
           <p:cNvSpPr/>
           <p:nvPr/>
         </p:nvSpPr>
@@ -8557,7 +9150,7 @@
       </p:sp>
       <p:sp>
         <p:nvSpPr>
-          <p:cNvPr id="16" name="TextBox 15"/>
+          <p:cNvPr id="18" name="TextBox 17"/>
           <p:cNvSpPr txBox="1"/>
           <p:nvPr/>
         </p:nvSpPr>
@@ -8600,7 +9193,7 @@
       </p:sp>
       <p:sp>
         <p:nvSpPr>
-          <p:cNvPr id="17" name="Oval 16"/>
+          <p:cNvPr id="19" name="Oval 18"/>
           <p:cNvSpPr/>
           <p:nvPr/>
         </p:nvSpPr>
@@ -8653,7 +9246,7 @@
       </p:sp>
       <p:sp>
         <p:nvSpPr>
-          <p:cNvPr id="18" name="TextBox 17"/>
+          <p:cNvPr id="20" name="TextBox 19"/>
           <p:cNvSpPr txBox="1"/>
           <p:nvPr/>
         </p:nvSpPr>
@@ -9077,14 +9670,177 @@
       </p:pic>
       <p:sp>
         <p:nvSpPr>
-          <p:cNvPr id="11" name="TextBox 10"/>
+          <p:cNvPr id="11" name="Rounded Rectangle 10"/>
+          <p:cNvSpPr/>
+          <p:nvPr/>
+        </p:nvSpPr>
+        <p:spPr>
+          <a:xfrm>
+            <a:off x="411479" y="1444752"/>
+            <a:ext cx="11368735" cy="4800600"/>
+          </a:xfrm>
+          <a:prstGeom prst="roundRect">
+            <a:avLst>
+              <a:gd name="adj" fmla="val 4000"/>
+            </a:avLst>
+          </a:prstGeom>
+          <a:solidFill>
+            <a:srgbClr val="FFFFFF">
+              <a:alpha val="84000"/>
+            </a:srgbClr>
+          </a:solidFill>
+          <a:ln w="19050">
+            <a:solidFill>
+              <a:srgbClr val="FFFFFF"/>
+            </a:solidFill>
+          </a:ln>
+          <a:effectLst>
+            <a:outerShdw blurRad="203200" dist="50800" dir="5400000" algn="t" rotWithShape="0">
+              <a:srgbClr val="1A2340">
+                <a:alpha val="20000"/>
+              </a:srgbClr>
+            </a:outerShdw>
+          </a:effectLst>
+        </p:spPr>
+        <p:style>
+          <a:lnRef idx="1">
+            <a:schemeClr val="accent1"/>
+          </a:lnRef>
+          <a:fillRef idx="3">
+            <a:schemeClr val="accent1"/>
+          </a:fillRef>
+          <a:effectRef idx="2">
+            <a:schemeClr val="accent1"/>
+          </a:effectRef>
+          <a:fontRef idx="minor">
+            <a:schemeClr val="lt1"/>
+          </a:fontRef>
+        </p:style>
+        <p:txBody>
+          <a:bodyPr rtlCol="0" anchor="ctr"/>
+          <a:lstStyle/>
+          <a:p>
+            <a:pPr algn="ctr"/>
+          </a:p>
+        </p:txBody>
+      </p:sp>
+      <p:sp>
+        <p:nvSpPr>
+          <p:cNvPr id="12" name="Rounded Rectangle 11"/>
+          <p:cNvSpPr/>
+          <p:nvPr/>
+        </p:nvSpPr>
+        <p:spPr>
+          <a:xfrm>
+            <a:off x="731519" y="1508760"/>
+            <a:ext cx="10728655" cy="32004"/>
+          </a:xfrm>
+          <a:prstGeom prst="roundRect">
+            <a:avLst>
+              <a:gd name="adj" fmla="val 50000"/>
+            </a:avLst>
+          </a:prstGeom>
+          <a:solidFill>
+            <a:srgbClr val="FFFFFF">
+              <a:alpha val="85000"/>
+            </a:srgbClr>
+          </a:solidFill>
+          <a:ln>
+            <a:noFill/>
+          </a:ln>
+          <a:effectLst/>
+        </p:spPr>
+        <p:style>
+          <a:lnRef idx="1">
+            <a:schemeClr val="accent1"/>
+          </a:lnRef>
+          <a:fillRef idx="3">
+            <a:schemeClr val="accent1"/>
+          </a:fillRef>
+          <a:effectRef idx="2">
+            <a:schemeClr val="accent1"/>
+          </a:effectRef>
+          <a:fontRef idx="minor">
+            <a:schemeClr val="lt1"/>
+          </a:fontRef>
+        </p:style>
+        <p:txBody>
+          <a:bodyPr rtlCol="0" anchor="ctr"/>
+          <a:lstStyle/>
+          <a:p>
+            <a:pPr algn="ctr"/>
+          </a:p>
+        </p:txBody>
+      </p:sp>
+      <p:sp>
+        <p:nvSpPr>
+          <p:cNvPr id="13" name="Rounded Rectangle 12"/>
+          <p:cNvSpPr/>
+          <p:nvPr/>
+        </p:nvSpPr>
+        <p:spPr>
+          <a:xfrm>
+            <a:off x="548640" y="1591056"/>
+            <a:ext cx="64008" cy="315468"/>
+          </a:xfrm>
+          <a:prstGeom prst="roundRect">
+            <a:avLst>
+              <a:gd name="adj" fmla="val 50000"/>
+            </a:avLst>
+          </a:prstGeom>
+          <a:solidFill>
+            <a:srgbClr val="8D6A2A"/>
+          </a:solidFill>
+          <a:ln>
+            <a:noFill/>
+          </a:ln>
+          <a:effectLst>
+            <a:outerShdw blurRad="203200" dist="50800" dir="5400000" algn="t" rotWithShape="0">
+              <a:srgbClr val="1A2340">
+                <a:alpha val="20000"/>
+              </a:srgbClr>
+            </a:outerShdw>
+          </a:effectLst>
+          <a:scene3d>
+            <a:camera prst="orthographicFront"/>
+            <a:lightRig rig="threePt" dir="t"/>
+          </a:scene3d>
+          <a:sp3d>
+            <a:bevelT w="44450" h="25400" prst="softRound"/>
+          </a:sp3d>
+        </p:spPr>
+        <p:style>
+          <a:lnRef idx="1">
+            <a:schemeClr val="accent1"/>
+          </a:lnRef>
+          <a:fillRef idx="3">
+            <a:schemeClr val="accent1"/>
+          </a:fillRef>
+          <a:effectRef idx="2">
+            <a:schemeClr val="accent1"/>
+          </a:effectRef>
+          <a:fontRef idx="minor">
+            <a:schemeClr val="lt1"/>
+          </a:fontRef>
+        </p:style>
+        <p:txBody>
+          <a:bodyPr rtlCol="0" anchor="ctr"/>
+          <a:lstStyle/>
+          <a:p>
+            <a:pPr algn="ctr"/>
+          </a:p>
+        </p:txBody>
+      </p:sp>
+      <p:sp>
+        <p:nvSpPr>
+          <p:cNvPr id="14" name="TextBox 13"/>
           <p:cNvSpPr txBox="1"/>
           <p:nvPr/>
         </p:nvSpPr>
         <p:spPr>
           <a:xfrm>
-            <a:off x="548640" y="1554480"/>
-            <a:ext cx="11094415" cy="795528"/>
+            <a:off x="777240" y="1554480"/>
+            <a:ext cx="10865815" cy="795528"/>
           </a:xfrm>
           <a:prstGeom prst="rect">
             <a:avLst/>
@@ -9116,7 +9872,7 @@
       </p:sp>
       <p:sp>
         <p:nvSpPr>
-          <p:cNvPr id="12" name="Oval 11"/>
+          <p:cNvPr id="15" name="Oval 14"/>
           <p:cNvSpPr/>
           <p:nvPr/>
         </p:nvSpPr>
@@ -9169,7 +9925,7 @@
       </p:sp>
       <p:sp>
         <p:nvSpPr>
-          <p:cNvPr id="13" name="TextBox 12"/>
+          <p:cNvPr id="16" name="TextBox 15"/>
           <p:cNvSpPr txBox="1"/>
           <p:nvPr/>
         </p:nvSpPr>
@@ -9212,7 +9968,7 @@
       </p:sp>
       <p:sp>
         <p:nvSpPr>
-          <p:cNvPr id="14" name="Oval 13"/>
+          <p:cNvPr id="17" name="Oval 16"/>
           <p:cNvSpPr/>
           <p:nvPr/>
         </p:nvSpPr>
@@ -9265,7 +10021,7 @@
       </p:sp>
       <p:sp>
         <p:nvSpPr>
-          <p:cNvPr id="15" name="TextBox 14"/>
+          <p:cNvPr id="18" name="TextBox 17"/>
           <p:cNvSpPr txBox="1"/>
           <p:nvPr/>
         </p:nvSpPr>
@@ -9308,7 +10064,7 @@
       </p:sp>
       <p:sp>
         <p:nvSpPr>
-          <p:cNvPr id="16" name="Oval 15"/>
+          <p:cNvPr id="19" name="Oval 18"/>
           <p:cNvSpPr/>
           <p:nvPr/>
         </p:nvSpPr>
@@ -9361,7 +10117,7 @@
       </p:sp>
       <p:sp>
         <p:nvSpPr>
-          <p:cNvPr id="17" name="TextBox 16"/>
+          <p:cNvPr id="20" name="TextBox 19"/>
           <p:cNvSpPr txBox="1"/>
           <p:nvPr/>
         </p:nvSpPr>
@@ -9404,7 +10160,7 @@
       </p:sp>
       <p:sp>
         <p:nvSpPr>
-          <p:cNvPr id="18" name="Oval 17"/>
+          <p:cNvPr id="21" name="Oval 20"/>
           <p:cNvSpPr/>
           <p:nvPr/>
         </p:nvSpPr>
@@ -9457,7 +10213,7 @@
       </p:sp>
       <p:sp>
         <p:nvSpPr>
-          <p:cNvPr id="19" name="TextBox 18"/>
+          <p:cNvPr id="22" name="TextBox 21"/>
           <p:cNvSpPr txBox="1"/>
           <p:nvPr/>
         </p:nvSpPr>
@@ -9500,7 +10256,7 @@
       </p:sp>
       <p:sp>
         <p:nvSpPr>
-          <p:cNvPr id="20" name="Oval 19"/>
+          <p:cNvPr id="23" name="Oval 22"/>
           <p:cNvSpPr/>
           <p:nvPr/>
         </p:nvSpPr>
@@ -9553,7 +10309,7 @@
       </p:sp>
       <p:sp>
         <p:nvSpPr>
-          <p:cNvPr id="21" name="TextBox 20"/>
+          <p:cNvPr id="24" name="TextBox 23"/>
           <p:cNvSpPr txBox="1"/>
           <p:nvPr/>
         </p:nvSpPr>
@@ -9975,9 +10731,113 @@
           </a:prstGeom>
         </p:spPr>
       </p:pic>
+      <p:sp>
+        <p:nvSpPr>
+          <p:cNvPr id="11" name="Rounded Rectangle 10"/>
+          <p:cNvSpPr/>
+          <p:nvPr/>
+        </p:nvSpPr>
+        <p:spPr>
+          <a:xfrm>
+            <a:off x="411479" y="1444752"/>
+            <a:ext cx="11368735" cy="4800600"/>
+          </a:xfrm>
+          <a:prstGeom prst="roundRect">
+            <a:avLst>
+              <a:gd name="adj" fmla="val 4000"/>
+            </a:avLst>
+          </a:prstGeom>
+          <a:solidFill>
+            <a:srgbClr val="FFFFFF">
+              <a:alpha val="84000"/>
+            </a:srgbClr>
+          </a:solidFill>
+          <a:ln w="19050">
+            <a:solidFill>
+              <a:srgbClr val="FFFFFF"/>
+            </a:solidFill>
+          </a:ln>
+          <a:effectLst>
+            <a:outerShdw blurRad="203200" dist="50800" dir="5400000" algn="t" rotWithShape="0">
+              <a:srgbClr val="1A2340">
+                <a:alpha val="20000"/>
+              </a:srgbClr>
+            </a:outerShdw>
+          </a:effectLst>
+        </p:spPr>
+        <p:style>
+          <a:lnRef idx="1">
+            <a:schemeClr val="accent1"/>
+          </a:lnRef>
+          <a:fillRef idx="3">
+            <a:schemeClr val="accent1"/>
+          </a:fillRef>
+          <a:effectRef idx="2">
+            <a:schemeClr val="accent1"/>
+          </a:effectRef>
+          <a:fontRef idx="minor">
+            <a:schemeClr val="lt1"/>
+          </a:fontRef>
+        </p:style>
+        <p:txBody>
+          <a:bodyPr rtlCol="0" anchor="ctr"/>
+          <a:lstStyle/>
+          <a:p>
+            <a:pPr algn="ctr"/>
+          </a:p>
+        </p:txBody>
+      </p:sp>
+      <p:sp>
+        <p:nvSpPr>
+          <p:cNvPr id="12" name="Rounded Rectangle 11"/>
+          <p:cNvSpPr/>
+          <p:nvPr/>
+        </p:nvSpPr>
+        <p:spPr>
+          <a:xfrm>
+            <a:off x="731519" y="1508760"/>
+            <a:ext cx="10728655" cy="32004"/>
+          </a:xfrm>
+          <a:prstGeom prst="roundRect">
+            <a:avLst>
+              <a:gd name="adj" fmla="val 50000"/>
+            </a:avLst>
+          </a:prstGeom>
+          <a:solidFill>
+            <a:srgbClr val="FFFFFF">
+              <a:alpha val="85000"/>
+            </a:srgbClr>
+          </a:solidFill>
+          <a:ln>
+            <a:noFill/>
+          </a:ln>
+          <a:effectLst/>
+        </p:spPr>
+        <p:style>
+          <a:lnRef idx="1">
+            <a:schemeClr val="accent1"/>
+          </a:lnRef>
+          <a:fillRef idx="3">
+            <a:schemeClr val="accent1"/>
+          </a:fillRef>
+          <a:effectRef idx="2">
+            <a:schemeClr val="accent1"/>
+          </a:effectRef>
+          <a:fontRef idx="minor">
+            <a:schemeClr val="lt1"/>
+          </a:fontRef>
+        </p:style>
+        <p:txBody>
+          <a:bodyPr rtlCol="0" anchor="ctr"/>
+          <a:lstStyle/>
+          <a:p>
+            <a:pPr algn="ctr"/>
+          </a:p>
+        </p:txBody>
+      </p:sp>
       <p:graphicFrame>
         <p:nvGraphicFramePr>
-          <p:cNvPr id="11" name="Table 10"/>
+          <p:cNvPr id="13" name="Table 12"/>
           <p:cNvGraphicFramePr>
             <a:graphicFrameLocks noGrp="1"/>
           </p:cNvGraphicFramePr>
@@ -10927,9 +11787,113 @@
           </a:prstGeom>
         </p:spPr>
       </p:pic>
+      <p:sp>
+        <p:nvSpPr>
+          <p:cNvPr id="11" name="Rounded Rectangle 10"/>
+          <p:cNvSpPr/>
+          <p:nvPr/>
+        </p:nvSpPr>
+        <p:spPr>
+          <a:xfrm>
+            <a:off x="411479" y="1444752"/>
+            <a:ext cx="11368735" cy="4800600"/>
+          </a:xfrm>
+          <a:prstGeom prst="roundRect">
+            <a:avLst>
+              <a:gd name="adj" fmla="val 4000"/>
+            </a:avLst>
+          </a:prstGeom>
+          <a:solidFill>
+            <a:srgbClr val="FFFFFF">
+              <a:alpha val="84000"/>
+            </a:srgbClr>
+          </a:solidFill>
+          <a:ln w="19050">
+            <a:solidFill>
+              <a:srgbClr val="FFFFFF"/>
+            </a:solidFill>
+          </a:ln>
+          <a:effectLst>
+            <a:outerShdw blurRad="203200" dist="50800" dir="5400000" algn="t" rotWithShape="0">
+              <a:srgbClr val="1A2340">
+                <a:alpha val="20000"/>
+              </a:srgbClr>
+            </a:outerShdw>
+          </a:effectLst>
+        </p:spPr>
+        <p:style>
+          <a:lnRef idx="1">
+            <a:schemeClr val="accent1"/>
+          </a:lnRef>
+          <a:fillRef idx="3">
+            <a:schemeClr val="accent1"/>
+          </a:fillRef>
+          <a:effectRef idx="2">
+            <a:schemeClr val="accent1"/>
+          </a:effectRef>
+          <a:fontRef idx="minor">
+            <a:schemeClr val="lt1"/>
+          </a:fontRef>
+        </p:style>
+        <p:txBody>
+          <a:bodyPr rtlCol="0" anchor="ctr"/>
+          <a:lstStyle/>
+          <a:p>
+            <a:pPr algn="ctr"/>
+          </a:p>
+        </p:txBody>
+      </p:sp>
+      <p:sp>
+        <p:nvSpPr>
+          <p:cNvPr id="12" name="Rounded Rectangle 11"/>
+          <p:cNvSpPr/>
+          <p:nvPr/>
+        </p:nvSpPr>
+        <p:spPr>
+          <a:xfrm>
+            <a:off x="731519" y="1508760"/>
+            <a:ext cx="10728655" cy="32004"/>
+          </a:xfrm>
+          <a:prstGeom prst="roundRect">
+            <a:avLst>
+              <a:gd name="adj" fmla="val 50000"/>
+            </a:avLst>
+          </a:prstGeom>
+          <a:solidFill>
+            <a:srgbClr val="FFFFFF">
+              <a:alpha val="85000"/>
+            </a:srgbClr>
+          </a:solidFill>
+          <a:ln>
+            <a:noFill/>
+          </a:ln>
+          <a:effectLst/>
+        </p:spPr>
+        <p:style>
+          <a:lnRef idx="1">
+            <a:schemeClr val="accent1"/>
+          </a:lnRef>
+          <a:fillRef idx="3">
+            <a:schemeClr val="accent1"/>
+          </a:fillRef>
+          <a:effectRef idx="2">
+            <a:schemeClr val="accent1"/>
+          </a:effectRef>
+          <a:fontRef idx="minor">
+            <a:schemeClr val="lt1"/>
+          </a:fontRef>
+        </p:style>
+        <p:txBody>
+          <a:bodyPr rtlCol="0" anchor="ctr"/>
+          <a:lstStyle/>
+          <a:p>
+            <a:pPr algn="ctr"/>
+          </a:p>
+        </p:txBody>
+      </p:sp>
       <p:graphicFrame>
         <p:nvGraphicFramePr>
-          <p:cNvPr id="11" name="Table 10"/>
+          <p:cNvPr id="13" name="Table 12"/>
           <p:cNvGraphicFramePr>
             <a:graphicFrameLocks noGrp="1"/>
           </p:cNvGraphicFramePr>
@@ -11813,7 +12777,111 @@
       </p:pic>
       <p:sp>
         <p:nvSpPr>
-          <p:cNvPr id="11" name="Oval 10"/>
+          <p:cNvPr id="11" name="Rounded Rectangle 10"/>
+          <p:cNvSpPr/>
+          <p:nvPr/>
+        </p:nvSpPr>
+        <p:spPr>
+          <a:xfrm>
+            <a:off x="411479" y="1444752"/>
+            <a:ext cx="11368735" cy="4800600"/>
+          </a:xfrm>
+          <a:prstGeom prst="roundRect">
+            <a:avLst>
+              <a:gd name="adj" fmla="val 4000"/>
+            </a:avLst>
+          </a:prstGeom>
+          <a:solidFill>
+            <a:srgbClr val="FFFFFF">
+              <a:alpha val="84000"/>
+            </a:srgbClr>
+          </a:solidFill>
+          <a:ln w="19050">
+            <a:solidFill>
+              <a:srgbClr val="FFFFFF"/>
+            </a:solidFill>
+          </a:ln>
+          <a:effectLst>
+            <a:outerShdw blurRad="203200" dist="50800" dir="5400000" algn="t" rotWithShape="0">
+              <a:srgbClr val="1A2340">
+                <a:alpha val="20000"/>
+              </a:srgbClr>
+            </a:outerShdw>
+          </a:effectLst>
+        </p:spPr>
+        <p:style>
+          <a:lnRef idx="1">
+            <a:schemeClr val="accent1"/>
+          </a:lnRef>
+          <a:fillRef idx="3">
+            <a:schemeClr val="accent1"/>
+          </a:fillRef>
+          <a:effectRef idx="2">
+            <a:schemeClr val="accent1"/>
+          </a:effectRef>
+          <a:fontRef idx="minor">
+            <a:schemeClr val="lt1"/>
+          </a:fontRef>
+        </p:style>
+        <p:txBody>
+          <a:bodyPr rtlCol="0" anchor="ctr"/>
+          <a:lstStyle/>
+          <a:p>
+            <a:pPr algn="ctr"/>
+          </a:p>
+        </p:txBody>
+      </p:sp>
+      <p:sp>
+        <p:nvSpPr>
+          <p:cNvPr id="12" name="Rounded Rectangle 11"/>
+          <p:cNvSpPr/>
+          <p:nvPr/>
+        </p:nvSpPr>
+        <p:spPr>
+          <a:xfrm>
+            <a:off x="731519" y="1508760"/>
+            <a:ext cx="10728655" cy="32004"/>
+          </a:xfrm>
+          <a:prstGeom prst="roundRect">
+            <a:avLst>
+              <a:gd name="adj" fmla="val 50000"/>
+            </a:avLst>
+          </a:prstGeom>
+          <a:solidFill>
+            <a:srgbClr val="FFFFFF">
+              <a:alpha val="85000"/>
+            </a:srgbClr>
+          </a:solidFill>
+          <a:ln>
+            <a:noFill/>
+          </a:ln>
+          <a:effectLst/>
+        </p:spPr>
+        <p:style>
+          <a:lnRef idx="1">
+            <a:schemeClr val="accent1"/>
+          </a:lnRef>
+          <a:fillRef idx="3">
+            <a:schemeClr val="accent1"/>
+          </a:fillRef>
+          <a:effectRef idx="2">
+            <a:schemeClr val="accent1"/>
+          </a:effectRef>
+          <a:fontRef idx="minor">
+            <a:schemeClr val="lt1"/>
+          </a:fontRef>
+        </p:style>
+        <p:txBody>
+          <a:bodyPr rtlCol="0" anchor="ctr"/>
+          <a:lstStyle/>
+          <a:p>
+            <a:pPr algn="ctr"/>
+          </a:p>
+        </p:txBody>
+      </p:sp>
+      <p:sp>
+        <p:nvSpPr>
+          <p:cNvPr id="13" name="Oval 12"/>
           <p:cNvSpPr/>
           <p:nvPr/>
         </p:nvSpPr>
@@ -11866,7 +12934,7 @@
       </p:sp>
       <p:sp>
         <p:nvSpPr>
-          <p:cNvPr id="12" name="TextBox 11"/>
+          <p:cNvPr id="14" name="TextBox 13"/>
           <p:cNvSpPr txBox="1"/>
           <p:nvPr/>
         </p:nvSpPr>
@@ -11900,7 +12968,7 @@
       </p:sp>
       <p:sp>
         <p:nvSpPr>
-          <p:cNvPr id="13" name="Oval 12"/>
+          <p:cNvPr id="15" name="Oval 14"/>
           <p:cNvSpPr/>
           <p:nvPr/>
         </p:nvSpPr>
@@ -11953,7 +13021,7 @@
       </p:sp>
       <p:sp>
         <p:nvSpPr>
-          <p:cNvPr id="14" name="TextBox 13"/>
+          <p:cNvPr id="16" name="TextBox 15"/>
           <p:cNvSpPr txBox="1"/>
           <p:nvPr/>
         </p:nvSpPr>
@@ -11987,7 +13055,7 @@
       </p:sp>
       <p:sp>
         <p:nvSpPr>
-          <p:cNvPr id="15" name="Oval 14"/>
+          <p:cNvPr id="17" name="Oval 16"/>
           <p:cNvSpPr/>
           <p:nvPr/>
         </p:nvSpPr>
@@ -12040,7 +13108,7 @@
       </p:sp>
       <p:sp>
         <p:nvSpPr>
-          <p:cNvPr id="16" name="TextBox 15"/>
+          <p:cNvPr id="18" name="TextBox 17"/>
           <p:cNvSpPr txBox="1"/>
           <p:nvPr/>
         </p:nvSpPr>
@@ -12074,7 +13142,7 @@
       </p:sp>
       <p:sp>
         <p:nvSpPr>
-          <p:cNvPr id="17" name="Oval 16"/>
+          <p:cNvPr id="19" name="Oval 18"/>
           <p:cNvSpPr/>
           <p:nvPr/>
         </p:nvSpPr>
@@ -12127,7 +13195,7 @@
       </p:sp>
       <p:sp>
         <p:nvSpPr>
-          <p:cNvPr id="18" name="TextBox 17"/>
+          <p:cNvPr id="20" name="TextBox 19"/>
           <p:cNvSpPr txBox="1"/>
           <p:nvPr/>
         </p:nvSpPr>
@@ -12542,7 +13610,111 @@
       </p:pic>
       <p:sp>
         <p:nvSpPr>
-          <p:cNvPr id="11" name="TextBox 10"/>
+          <p:cNvPr id="11" name="Rounded Rectangle 10"/>
+          <p:cNvSpPr/>
+          <p:nvPr/>
+        </p:nvSpPr>
+        <p:spPr>
+          <a:xfrm>
+            <a:off x="411479" y="1444752"/>
+            <a:ext cx="11368735" cy="4800600"/>
+          </a:xfrm>
+          <a:prstGeom prst="roundRect">
+            <a:avLst>
+              <a:gd name="adj" fmla="val 4000"/>
+            </a:avLst>
+          </a:prstGeom>
+          <a:solidFill>
+            <a:srgbClr val="FFFFFF">
+              <a:alpha val="84000"/>
+            </a:srgbClr>
+          </a:solidFill>
+          <a:ln w="19050">
+            <a:solidFill>
+              <a:srgbClr val="FFFFFF"/>
+            </a:solidFill>
+          </a:ln>
+          <a:effectLst>
+            <a:outerShdw blurRad="203200" dist="50800" dir="5400000" algn="t" rotWithShape="0">
+              <a:srgbClr val="1A2340">
+                <a:alpha val="20000"/>
+              </a:srgbClr>
+            </a:outerShdw>
+          </a:effectLst>
+        </p:spPr>
+        <p:style>
+          <a:lnRef idx="1">
+            <a:schemeClr val="accent1"/>
+          </a:lnRef>
+          <a:fillRef idx="3">
+            <a:schemeClr val="accent1"/>
+          </a:fillRef>
+          <a:effectRef idx="2">
+            <a:schemeClr val="accent1"/>
+          </a:effectRef>
+          <a:fontRef idx="minor">
+            <a:schemeClr val="lt1"/>
+          </a:fontRef>
+        </p:style>
+        <p:txBody>
+          <a:bodyPr rtlCol="0" anchor="ctr"/>
+          <a:lstStyle/>
+          <a:p>
+            <a:pPr algn="ctr"/>
+          </a:p>
+        </p:txBody>
+      </p:sp>
+      <p:sp>
+        <p:nvSpPr>
+          <p:cNvPr id="12" name="Rounded Rectangle 11"/>
+          <p:cNvSpPr/>
+          <p:nvPr/>
+        </p:nvSpPr>
+        <p:spPr>
+          <a:xfrm>
+            <a:off x="731519" y="1508760"/>
+            <a:ext cx="10728655" cy="32004"/>
+          </a:xfrm>
+          <a:prstGeom prst="roundRect">
+            <a:avLst>
+              <a:gd name="adj" fmla="val 50000"/>
+            </a:avLst>
+          </a:prstGeom>
+          <a:solidFill>
+            <a:srgbClr val="FFFFFF">
+              <a:alpha val="85000"/>
+            </a:srgbClr>
+          </a:solidFill>
+          <a:ln>
+            <a:noFill/>
+          </a:ln>
+          <a:effectLst/>
+        </p:spPr>
+        <p:style>
+          <a:lnRef idx="1">
+            <a:schemeClr val="accent1"/>
+          </a:lnRef>
+          <a:fillRef idx="3">
+            <a:schemeClr val="accent1"/>
+          </a:fillRef>
+          <a:effectRef idx="2">
+            <a:schemeClr val="accent1"/>
+          </a:effectRef>
+          <a:fontRef idx="minor">
+            <a:schemeClr val="lt1"/>
+          </a:fontRef>
+        </p:style>
+        <p:txBody>
+          <a:bodyPr rtlCol="0" anchor="ctr"/>
+          <a:lstStyle/>
+          <a:p>
+            <a:pPr algn="ctr"/>
+          </a:p>
+        </p:txBody>
+      </p:sp>
+      <p:sp>
+        <p:nvSpPr>
+          <p:cNvPr id="13" name="TextBox 12"/>
           <p:cNvSpPr txBox="1"/>
           <p:nvPr/>
         </p:nvSpPr>
@@ -12576,7 +13748,7 @@
       </p:sp>
       <p:sp>
         <p:nvSpPr>
-          <p:cNvPr id="12" name="Rounded Rectangle 11"/>
+          <p:cNvPr id="14" name="Rounded Rectangle 13"/>
           <p:cNvSpPr/>
           <p:nvPr/>
         </p:nvSpPr>
@@ -12632,7 +13804,7 @@
       </p:sp>
       <p:sp>
         <p:nvSpPr>
-          <p:cNvPr id="13" name="Oval 12"/>
+          <p:cNvPr id="15" name="Oval 14"/>
           <p:cNvSpPr/>
           <p:nvPr/>
         </p:nvSpPr>
@@ -12685,7 +13857,7 @@
       </p:sp>
       <p:sp>
         <p:nvSpPr>
-          <p:cNvPr id="14" name="TextBox 13"/>
+          <p:cNvPr id="16" name="TextBox 15"/>
           <p:cNvSpPr txBox="1"/>
           <p:nvPr/>
         </p:nvSpPr>
@@ -12719,7 +13891,7 @@
       </p:sp>
       <p:sp>
         <p:nvSpPr>
-          <p:cNvPr id="15" name="Rounded Rectangle 14"/>
+          <p:cNvPr id="17" name="Rounded Rectangle 16"/>
           <p:cNvSpPr/>
           <p:nvPr/>
         </p:nvSpPr>
@@ -12775,7 +13947,7 @@
       </p:sp>
       <p:sp>
         <p:nvSpPr>
-          <p:cNvPr id="16" name="Oval 15"/>
+          <p:cNvPr id="18" name="Oval 17"/>
           <p:cNvSpPr/>
           <p:nvPr/>
         </p:nvSpPr>
@@ -12828,7 +14000,7 @@
       </p:sp>
       <p:sp>
         <p:nvSpPr>
-          <p:cNvPr id="17" name="TextBox 16"/>
+          <p:cNvPr id="19" name="TextBox 18"/>
           <p:cNvSpPr txBox="1"/>
           <p:nvPr/>
         </p:nvSpPr>
@@ -12862,7 +14034,7 @@
       </p:sp>
       <p:sp>
         <p:nvSpPr>
-          <p:cNvPr id="18" name="Rounded Rectangle 17"/>
+          <p:cNvPr id="20" name="Rounded Rectangle 19"/>
           <p:cNvSpPr/>
           <p:nvPr/>
         </p:nvSpPr>
@@ -12918,7 +14090,7 @@
       </p:sp>
       <p:sp>
         <p:nvSpPr>
-          <p:cNvPr id="19" name="Oval 18"/>
+          <p:cNvPr id="21" name="Oval 20"/>
           <p:cNvSpPr/>
           <p:nvPr/>
         </p:nvSpPr>
@@ -12971,7 +14143,7 @@
       </p:sp>
       <p:sp>
         <p:nvSpPr>
-          <p:cNvPr id="20" name="TextBox 19"/>
+          <p:cNvPr id="22" name="TextBox 21"/>
           <p:cNvSpPr txBox="1"/>
           <p:nvPr/>
         </p:nvSpPr>
@@ -13005,7 +14177,7 @@
       </p:sp>
       <p:sp>
         <p:nvSpPr>
-          <p:cNvPr id="21" name="Rounded Rectangle 20"/>
+          <p:cNvPr id="23" name="Rounded Rectangle 22"/>
           <p:cNvSpPr/>
           <p:nvPr/>
         </p:nvSpPr>
@@ -13061,7 +14233,7 @@
       </p:sp>
       <p:sp>
         <p:nvSpPr>
-          <p:cNvPr id="22" name="Oval 21"/>
+          <p:cNvPr id="24" name="Oval 23"/>
           <p:cNvSpPr/>
           <p:nvPr/>
         </p:nvSpPr>
@@ -13114,7 +14286,7 @@
       </p:sp>
       <p:sp>
         <p:nvSpPr>
-          <p:cNvPr id="23" name="TextBox 22"/>
+          <p:cNvPr id="25" name="TextBox 24"/>
           <p:cNvSpPr txBox="1"/>
           <p:nvPr/>
         </p:nvSpPr>
@@ -13529,7 +14701,111 @@
       </p:pic>
       <p:sp>
         <p:nvSpPr>
-          <p:cNvPr id="11" name="TextBox 10"/>
+          <p:cNvPr id="11" name="Rounded Rectangle 10"/>
+          <p:cNvSpPr/>
+          <p:nvPr/>
+        </p:nvSpPr>
+        <p:spPr>
+          <a:xfrm>
+            <a:off x="411479" y="1444752"/>
+            <a:ext cx="11368735" cy="4800600"/>
+          </a:xfrm>
+          <a:prstGeom prst="roundRect">
+            <a:avLst>
+              <a:gd name="adj" fmla="val 4000"/>
+            </a:avLst>
+          </a:prstGeom>
+          <a:solidFill>
+            <a:srgbClr val="FFFFFF">
+              <a:alpha val="84000"/>
+            </a:srgbClr>
+          </a:solidFill>
+          <a:ln w="19050">
+            <a:solidFill>
+              <a:srgbClr val="FFFFFF"/>
+            </a:solidFill>
+          </a:ln>
+          <a:effectLst>
+            <a:outerShdw blurRad="203200" dist="50800" dir="5400000" algn="t" rotWithShape="0">
+              <a:srgbClr val="1A2340">
+                <a:alpha val="20000"/>
+              </a:srgbClr>
+            </a:outerShdw>
+          </a:effectLst>
+        </p:spPr>
+        <p:style>
+          <a:lnRef idx="1">
+            <a:schemeClr val="accent1"/>
+          </a:lnRef>
+          <a:fillRef idx="3">
+            <a:schemeClr val="accent1"/>
+          </a:fillRef>
+          <a:effectRef idx="2">
+            <a:schemeClr val="accent1"/>
+          </a:effectRef>
+          <a:fontRef idx="minor">
+            <a:schemeClr val="lt1"/>
+          </a:fontRef>
+        </p:style>
+        <p:txBody>
+          <a:bodyPr rtlCol="0" anchor="ctr"/>
+          <a:lstStyle/>
+          <a:p>
+            <a:pPr algn="ctr"/>
+          </a:p>
+        </p:txBody>
+      </p:sp>
+      <p:sp>
+        <p:nvSpPr>
+          <p:cNvPr id="12" name="Rounded Rectangle 11"/>
+          <p:cNvSpPr/>
+          <p:nvPr/>
+        </p:nvSpPr>
+        <p:spPr>
+          <a:xfrm>
+            <a:off x="731519" y="1508760"/>
+            <a:ext cx="10728655" cy="32004"/>
+          </a:xfrm>
+          <a:prstGeom prst="roundRect">
+            <a:avLst>
+              <a:gd name="adj" fmla="val 50000"/>
+            </a:avLst>
+          </a:prstGeom>
+          <a:solidFill>
+            <a:srgbClr val="FFFFFF">
+              <a:alpha val="85000"/>
+            </a:srgbClr>
+          </a:solidFill>
+          <a:ln>
+            <a:noFill/>
+          </a:ln>
+          <a:effectLst/>
+        </p:spPr>
+        <p:style>
+          <a:lnRef idx="1">
+            <a:schemeClr val="accent1"/>
+          </a:lnRef>
+          <a:fillRef idx="3">
+            <a:schemeClr val="accent1"/>
+          </a:fillRef>
+          <a:effectRef idx="2">
+            <a:schemeClr val="accent1"/>
+          </a:effectRef>
+          <a:fontRef idx="minor">
+            <a:schemeClr val="lt1"/>
+          </a:fontRef>
+        </p:style>
+        <p:txBody>
+          <a:bodyPr rtlCol="0" anchor="ctr"/>
+          <a:lstStyle/>
+          <a:p>
+            <a:pPr algn="ctr"/>
+          </a:p>
+        </p:txBody>
+      </p:sp>
+      <p:sp>
+        <p:nvSpPr>
+          <p:cNvPr id="13" name="TextBox 12"/>
           <p:cNvSpPr txBox="1"/>
           <p:nvPr/>
         </p:nvSpPr>
@@ -13563,7 +14839,7 @@
       </p:sp>
       <p:sp>
         <p:nvSpPr>
-          <p:cNvPr id="12" name="Rounded Rectangle 11"/>
+          <p:cNvPr id="14" name="Rounded Rectangle 13"/>
           <p:cNvSpPr/>
           <p:nvPr/>
         </p:nvSpPr>
@@ -13622,7 +14898,7 @@
       </p:sp>
       <p:sp>
         <p:nvSpPr>
-          <p:cNvPr id="13" name="Oval 12"/>
+          <p:cNvPr id="15" name="Oval 14"/>
           <p:cNvSpPr/>
           <p:nvPr/>
         </p:nvSpPr>
@@ -13675,7 +14951,7 @@
       </p:sp>
       <p:sp>
         <p:nvSpPr>
-          <p:cNvPr id="14" name="TextBox 13"/>
+          <p:cNvPr id="16" name="TextBox 15"/>
           <p:cNvSpPr txBox="1"/>
           <p:nvPr/>
         </p:nvSpPr>
@@ -13709,7 +14985,7 @@
       </p:sp>
       <p:sp>
         <p:nvSpPr>
-          <p:cNvPr id="15" name="Rounded Rectangle 14"/>
+          <p:cNvPr id="17" name="Rounded Rectangle 16"/>
           <p:cNvSpPr/>
           <p:nvPr/>
         </p:nvSpPr>
@@ -13765,7 +15041,7 @@
       </p:sp>
       <p:sp>
         <p:nvSpPr>
-          <p:cNvPr id="16" name="Oval 15"/>
+          <p:cNvPr id="18" name="Oval 17"/>
           <p:cNvSpPr/>
           <p:nvPr/>
         </p:nvSpPr>
@@ -13818,7 +15094,7 @@
       </p:sp>
       <p:sp>
         <p:nvSpPr>
-          <p:cNvPr id="17" name="TextBox 16"/>
+          <p:cNvPr id="19" name="TextBox 18"/>
           <p:cNvSpPr txBox="1"/>
           <p:nvPr/>
         </p:nvSpPr>
@@ -13852,7 +15128,7 @@
       </p:sp>
       <p:sp>
         <p:nvSpPr>
-          <p:cNvPr id="18" name="Rounded Rectangle 17"/>
+          <p:cNvPr id="20" name="Rounded Rectangle 19"/>
           <p:cNvSpPr/>
           <p:nvPr/>
         </p:nvSpPr>
@@ -13908,7 +15184,7 @@
       </p:sp>
       <p:sp>
         <p:nvSpPr>
-          <p:cNvPr id="19" name="Oval 18"/>
+          <p:cNvPr id="21" name="Oval 20"/>
           <p:cNvSpPr/>
           <p:nvPr/>
         </p:nvSpPr>
@@ -13961,7 +15237,7 @@
       </p:sp>
       <p:sp>
         <p:nvSpPr>
-          <p:cNvPr id="20" name="TextBox 19"/>
+          <p:cNvPr id="22" name="TextBox 21"/>
           <p:cNvSpPr txBox="1"/>
           <p:nvPr/>
         </p:nvSpPr>
@@ -13995,7 +15271,7 @@
       </p:sp>
       <p:sp>
         <p:nvSpPr>
-          <p:cNvPr id="21" name="Rounded Rectangle 20"/>
+          <p:cNvPr id="23" name="Rounded Rectangle 22"/>
           <p:cNvSpPr/>
           <p:nvPr/>
         </p:nvSpPr>
@@ -14051,7 +15327,7 @@
       </p:sp>
       <p:sp>
         <p:nvSpPr>
-          <p:cNvPr id="22" name="Oval 21"/>
+          <p:cNvPr id="24" name="Oval 23"/>
           <p:cNvSpPr/>
           <p:nvPr/>
         </p:nvSpPr>
@@ -14104,7 +15380,7 @@
       </p:sp>
       <p:sp>
         <p:nvSpPr>
-          <p:cNvPr id="23" name="TextBox 22"/>
+          <p:cNvPr id="25" name="TextBox 24"/>
           <p:cNvSpPr txBox="1"/>
           <p:nvPr/>
         </p:nvSpPr>
@@ -14138,7 +15414,7 @@
       </p:sp>
       <p:sp>
         <p:nvSpPr>
-          <p:cNvPr id="24" name="TextBox 23"/>
+          <p:cNvPr id="26" name="TextBox 25"/>
           <p:cNvSpPr txBox="1"/>
           <p:nvPr/>
         </p:nvSpPr>
@@ -14562,7 +15838,111 @@
       </p:pic>
       <p:sp>
         <p:nvSpPr>
-          <p:cNvPr id="11" name="Oval 10"/>
+          <p:cNvPr id="11" name="Rounded Rectangle 10"/>
+          <p:cNvSpPr/>
+          <p:nvPr/>
+        </p:nvSpPr>
+        <p:spPr>
+          <a:xfrm>
+            <a:off x="411479" y="1444752"/>
+            <a:ext cx="11368735" cy="4800600"/>
+          </a:xfrm>
+          <a:prstGeom prst="roundRect">
+            <a:avLst>
+              <a:gd name="adj" fmla="val 4000"/>
+            </a:avLst>
+          </a:prstGeom>
+          <a:solidFill>
+            <a:srgbClr val="FFFFFF">
+              <a:alpha val="84000"/>
+            </a:srgbClr>
+          </a:solidFill>
+          <a:ln w="19050">
+            <a:solidFill>
+              <a:srgbClr val="FFFFFF"/>
+            </a:solidFill>
+          </a:ln>
+          <a:effectLst>
+            <a:outerShdw blurRad="203200" dist="50800" dir="5400000" algn="t" rotWithShape="0">
+              <a:srgbClr val="1A2340">
+                <a:alpha val="20000"/>
+              </a:srgbClr>
+            </a:outerShdw>
+          </a:effectLst>
+        </p:spPr>
+        <p:style>
+          <a:lnRef idx="1">
+            <a:schemeClr val="accent1"/>
+          </a:lnRef>
+          <a:fillRef idx="3">
+            <a:schemeClr val="accent1"/>
+          </a:fillRef>
+          <a:effectRef idx="2">
+            <a:schemeClr val="accent1"/>
+          </a:effectRef>
+          <a:fontRef idx="minor">
+            <a:schemeClr val="lt1"/>
+          </a:fontRef>
+        </p:style>
+        <p:txBody>
+          <a:bodyPr rtlCol="0" anchor="ctr"/>
+          <a:lstStyle/>
+          <a:p>
+            <a:pPr algn="ctr"/>
+          </a:p>
+        </p:txBody>
+      </p:sp>
+      <p:sp>
+        <p:nvSpPr>
+          <p:cNvPr id="12" name="Rounded Rectangle 11"/>
+          <p:cNvSpPr/>
+          <p:nvPr/>
+        </p:nvSpPr>
+        <p:spPr>
+          <a:xfrm>
+            <a:off x="731519" y="1508760"/>
+            <a:ext cx="10728655" cy="32004"/>
+          </a:xfrm>
+          <a:prstGeom prst="roundRect">
+            <a:avLst>
+              <a:gd name="adj" fmla="val 50000"/>
+            </a:avLst>
+          </a:prstGeom>
+          <a:solidFill>
+            <a:srgbClr val="FFFFFF">
+              <a:alpha val="85000"/>
+            </a:srgbClr>
+          </a:solidFill>
+          <a:ln>
+            <a:noFill/>
+          </a:ln>
+          <a:effectLst/>
+        </p:spPr>
+        <p:style>
+          <a:lnRef idx="1">
+            <a:schemeClr val="accent1"/>
+          </a:lnRef>
+          <a:fillRef idx="3">
+            <a:schemeClr val="accent1"/>
+          </a:fillRef>
+          <a:effectRef idx="2">
+            <a:schemeClr val="accent1"/>
+          </a:effectRef>
+          <a:fontRef idx="minor">
+            <a:schemeClr val="lt1"/>
+          </a:fontRef>
+        </p:style>
+        <p:txBody>
+          <a:bodyPr rtlCol="0" anchor="ctr"/>
+          <a:lstStyle/>
+          <a:p>
+            <a:pPr algn="ctr"/>
+          </a:p>
+        </p:txBody>
+      </p:sp>
+      <p:sp>
+        <p:nvSpPr>
+          <p:cNvPr id="13" name="Oval 12"/>
           <p:cNvSpPr/>
           <p:nvPr/>
         </p:nvSpPr>
@@ -14615,7 +15995,7 @@
       </p:sp>
       <p:sp>
         <p:nvSpPr>
-          <p:cNvPr id="12" name="TextBox 11"/>
+          <p:cNvPr id="14" name="TextBox 13"/>
           <p:cNvSpPr txBox="1"/>
           <p:nvPr/>
         </p:nvSpPr>
@@ -14649,7 +16029,7 @@
       </p:sp>
       <p:sp>
         <p:nvSpPr>
-          <p:cNvPr id="13" name="Oval 12"/>
+          <p:cNvPr id="15" name="Oval 14"/>
           <p:cNvSpPr/>
           <p:nvPr/>
         </p:nvSpPr>
@@ -14702,7 +16082,7 @@
       </p:sp>
       <p:sp>
         <p:nvSpPr>
-          <p:cNvPr id="14" name="TextBox 13"/>
+          <p:cNvPr id="16" name="TextBox 15"/>
           <p:cNvSpPr txBox="1"/>
           <p:nvPr/>
         </p:nvSpPr>
@@ -14736,7 +16116,7 @@
       </p:sp>
       <p:sp>
         <p:nvSpPr>
-          <p:cNvPr id="15" name="Oval 14"/>
+          <p:cNvPr id="17" name="Oval 16"/>
           <p:cNvSpPr/>
           <p:nvPr/>
         </p:nvSpPr>
@@ -14789,7 +16169,7 @@
       </p:sp>
       <p:sp>
         <p:nvSpPr>
-          <p:cNvPr id="16" name="TextBox 15"/>
+          <p:cNvPr id="18" name="TextBox 17"/>
           <p:cNvSpPr txBox="1"/>
           <p:nvPr/>
         </p:nvSpPr>
@@ -14823,7 +16203,7 @@
       </p:sp>
       <p:sp>
         <p:nvSpPr>
-          <p:cNvPr id="17" name="Oval 16"/>
+          <p:cNvPr id="19" name="Oval 18"/>
           <p:cNvSpPr/>
           <p:nvPr/>
         </p:nvSpPr>
@@ -14876,7 +16256,7 @@
       </p:sp>
       <p:sp>
         <p:nvSpPr>
-          <p:cNvPr id="18" name="TextBox 17"/>
+          <p:cNvPr id="20" name="TextBox 19"/>
           <p:cNvSpPr txBox="1"/>
           <p:nvPr/>
         </p:nvSpPr>
@@ -14910,7 +16290,7 @@
       </p:sp>
       <p:sp>
         <p:nvSpPr>
-          <p:cNvPr id="19" name="Oval 18"/>
+          <p:cNvPr id="21" name="Oval 20"/>
           <p:cNvSpPr/>
           <p:nvPr/>
         </p:nvSpPr>
@@ -14963,7 +16343,7 @@
       </p:sp>
       <p:sp>
         <p:nvSpPr>
-          <p:cNvPr id="20" name="TextBox 19"/>
+          <p:cNvPr id="22" name="TextBox 21"/>
           <p:cNvSpPr txBox="1"/>
           <p:nvPr/>
         </p:nvSpPr>
@@ -14997,7 +16377,7 @@
       </p:sp>
       <p:sp>
         <p:nvSpPr>
-          <p:cNvPr id="21" name="Rounded Rectangle 20"/>
+          <p:cNvPr id="23" name="Rounded Rectangle 22"/>
           <p:cNvSpPr/>
           <p:nvPr/>
         </p:nvSpPr>
@@ -15053,7 +16433,7 @@
       </p:sp>
       <p:sp>
         <p:nvSpPr>
-          <p:cNvPr id="22" name="Rounded Rectangle 21"/>
+          <p:cNvPr id="24" name="Rounded Rectangle 23"/>
           <p:cNvSpPr/>
           <p:nvPr/>
         </p:nvSpPr>
@@ -15101,7 +16481,7 @@
       </p:sp>
       <p:sp>
         <p:nvSpPr>
-          <p:cNvPr id="23" name="TextBox 22"/>
+          <p:cNvPr id="25" name="TextBox 24"/>
           <p:cNvSpPr txBox="1"/>
           <p:nvPr/>
         </p:nvSpPr>
@@ -15559,7 +16939,111 @@
       </p:pic>
       <p:sp>
         <p:nvSpPr>
-          <p:cNvPr id="11" name="TextBox 10"/>
+          <p:cNvPr id="11" name="Rounded Rectangle 10"/>
+          <p:cNvSpPr/>
+          <p:nvPr/>
+        </p:nvSpPr>
+        <p:spPr>
+          <a:xfrm>
+            <a:off x="411479" y="1444752"/>
+            <a:ext cx="11368735" cy="4800600"/>
+          </a:xfrm>
+          <a:prstGeom prst="roundRect">
+            <a:avLst>
+              <a:gd name="adj" fmla="val 4000"/>
+            </a:avLst>
+          </a:prstGeom>
+          <a:solidFill>
+            <a:srgbClr val="FFFFFF">
+              <a:alpha val="84000"/>
+            </a:srgbClr>
+          </a:solidFill>
+          <a:ln w="19050">
+            <a:solidFill>
+              <a:srgbClr val="FFFFFF"/>
+            </a:solidFill>
+          </a:ln>
+          <a:effectLst>
+            <a:outerShdw blurRad="203200" dist="50800" dir="5400000" algn="t" rotWithShape="0">
+              <a:srgbClr val="1A2340">
+                <a:alpha val="20000"/>
+              </a:srgbClr>
+            </a:outerShdw>
+          </a:effectLst>
+        </p:spPr>
+        <p:style>
+          <a:lnRef idx="1">
+            <a:schemeClr val="accent1"/>
+          </a:lnRef>
+          <a:fillRef idx="3">
+            <a:schemeClr val="accent1"/>
+          </a:fillRef>
+          <a:effectRef idx="2">
+            <a:schemeClr val="accent1"/>
+          </a:effectRef>
+          <a:fontRef idx="minor">
+            <a:schemeClr val="lt1"/>
+          </a:fontRef>
+        </p:style>
+        <p:txBody>
+          <a:bodyPr rtlCol="0" anchor="ctr"/>
+          <a:lstStyle/>
+          <a:p>
+            <a:pPr algn="ctr"/>
+          </a:p>
+        </p:txBody>
+      </p:sp>
+      <p:sp>
+        <p:nvSpPr>
+          <p:cNvPr id="12" name="Rounded Rectangle 11"/>
+          <p:cNvSpPr/>
+          <p:nvPr/>
+        </p:nvSpPr>
+        <p:spPr>
+          <a:xfrm>
+            <a:off x="731519" y="1508760"/>
+            <a:ext cx="10728655" cy="32004"/>
+          </a:xfrm>
+          <a:prstGeom prst="roundRect">
+            <a:avLst>
+              <a:gd name="adj" fmla="val 50000"/>
+            </a:avLst>
+          </a:prstGeom>
+          <a:solidFill>
+            <a:srgbClr val="FFFFFF">
+              <a:alpha val="85000"/>
+            </a:srgbClr>
+          </a:solidFill>
+          <a:ln>
+            <a:noFill/>
+          </a:ln>
+          <a:effectLst/>
+        </p:spPr>
+        <p:style>
+          <a:lnRef idx="1">
+            <a:schemeClr val="accent1"/>
+          </a:lnRef>
+          <a:fillRef idx="3">
+            <a:schemeClr val="accent1"/>
+          </a:fillRef>
+          <a:effectRef idx="2">
+            <a:schemeClr val="accent1"/>
+          </a:effectRef>
+          <a:fontRef idx="minor">
+            <a:schemeClr val="lt1"/>
+          </a:fontRef>
+        </p:style>
+        <p:txBody>
+          <a:bodyPr rtlCol="0" anchor="ctr"/>
+          <a:lstStyle/>
+          <a:p>
+            <a:pPr algn="ctr"/>
+          </a:p>
+        </p:txBody>
+      </p:sp>
+      <p:sp>
+        <p:nvSpPr>
+          <p:cNvPr id="13" name="TextBox 12"/>
           <p:cNvSpPr txBox="1"/>
           <p:nvPr/>
         </p:nvSpPr>
@@ -15593,7 +17077,7 @@
       </p:sp>
       <p:sp>
         <p:nvSpPr>
-          <p:cNvPr id="12" name="Rounded Rectangle 11"/>
+          <p:cNvPr id="14" name="Rounded Rectangle 13"/>
           <p:cNvSpPr/>
           <p:nvPr/>
         </p:nvSpPr>
@@ -15649,7 +17133,7 @@
       </p:sp>
       <p:sp>
         <p:nvSpPr>
-          <p:cNvPr id="13" name="Oval 12"/>
+          <p:cNvPr id="15" name="Oval 14"/>
           <p:cNvSpPr/>
           <p:nvPr/>
         </p:nvSpPr>
@@ -15702,7 +17186,7 @@
       </p:sp>
       <p:sp>
         <p:nvSpPr>
-          <p:cNvPr id="14" name="TextBox 13"/>
+          <p:cNvPr id="16" name="TextBox 15"/>
           <p:cNvSpPr txBox="1"/>
           <p:nvPr/>
         </p:nvSpPr>
@@ -15736,7 +17220,7 @@
       </p:sp>
       <p:sp>
         <p:nvSpPr>
-          <p:cNvPr id="15" name="Rounded Rectangle 14"/>
+          <p:cNvPr id="17" name="Rounded Rectangle 16"/>
           <p:cNvSpPr/>
           <p:nvPr/>
         </p:nvSpPr>
@@ -15792,7 +17276,7 @@
       </p:sp>
       <p:sp>
         <p:nvSpPr>
-          <p:cNvPr id="16" name="Oval 15"/>
+          <p:cNvPr id="18" name="Oval 17"/>
           <p:cNvSpPr/>
           <p:nvPr/>
         </p:nvSpPr>
@@ -15845,7 +17329,7 @@
       </p:sp>
       <p:sp>
         <p:nvSpPr>
-          <p:cNvPr id="17" name="TextBox 16"/>
+          <p:cNvPr id="19" name="TextBox 18"/>
           <p:cNvSpPr txBox="1"/>
           <p:nvPr/>
         </p:nvSpPr>
@@ -15879,7 +17363,7 @@
       </p:sp>
       <p:sp>
         <p:nvSpPr>
-          <p:cNvPr id="18" name="Rounded Rectangle 17"/>
+          <p:cNvPr id="20" name="Rounded Rectangle 19"/>
           <p:cNvSpPr/>
           <p:nvPr/>
         </p:nvSpPr>
@@ -15935,7 +17419,7 @@
       </p:sp>
       <p:sp>
         <p:nvSpPr>
-          <p:cNvPr id="19" name="Oval 18"/>
+          <p:cNvPr id="21" name="Oval 20"/>
           <p:cNvSpPr/>
           <p:nvPr/>
         </p:nvSpPr>
@@ -15988,7 +17472,7 @@
       </p:sp>
       <p:sp>
         <p:nvSpPr>
-          <p:cNvPr id="20" name="TextBox 19"/>
+          <p:cNvPr id="22" name="TextBox 21"/>
           <p:cNvSpPr txBox="1"/>
           <p:nvPr/>
         </p:nvSpPr>
@@ -16022,7 +17506,7 @@
       </p:sp>
       <p:sp>
         <p:nvSpPr>
-          <p:cNvPr id="21" name="Rounded Rectangle 20"/>
+          <p:cNvPr id="23" name="Rounded Rectangle 22"/>
           <p:cNvSpPr/>
           <p:nvPr/>
         </p:nvSpPr>
@@ -16078,7 +17562,7 @@
       </p:sp>
       <p:sp>
         <p:nvSpPr>
-          <p:cNvPr id="22" name="Oval 21"/>
+          <p:cNvPr id="24" name="Oval 23"/>
           <p:cNvSpPr/>
           <p:nvPr/>
         </p:nvSpPr>
@@ -16131,7 +17615,7 @@
       </p:sp>
       <p:sp>
         <p:nvSpPr>
-          <p:cNvPr id="23" name="TextBox 22"/>
+          <p:cNvPr id="25" name="TextBox 24"/>
           <p:cNvSpPr txBox="1"/>
           <p:nvPr/>
         </p:nvSpPr>
@@ -16546,7 +18030,111 @@
       </p:pic>
       <p:sp>
         <p:nvSpPr>
-          <p:cNvPr id="11" name="TextBox 10"/>
+          <p:cNvPr id="11" name="Rounded Rectangle 10"/>
+          <p:cNvSpPr/>
+          <p:nvPr/>
+        </p:nvSpPr>
+        <p:spPr>
+          <a:xfrm>
+            <a:off x="411479" y="1444752"/>
+            <a:ext cx="11368735" cy="4800600"/>
+          </a:xfrm>
+          <a:prstGeom prst="roundRect">
+            <a:avLst>
+              <a:gd name="adj" fmla="val 4000"/>
+            </a:avLst>
+          </a:prstGeom>
+          <a:solidFill>
+            <a:srgbClr val="FFFFFF">
+              <a:alpha val="84000"/>
+            </a:srgbClr>
+          </a:solidFill>
+          <a:ln w="19050">
+            <a:solidFill>
+              <a:srgbClr val="FFFFFF"/>
+            </a:solidFill>
+          </a:ln>
+          <a:effectLst>
+            <a:outerShdw blurRad="203200" dist="50800" dir="5400000" algn="t" rotWithShape="0">
+              <a:srgbClr val="1A2340">
+                <a:alpha val="20000"/>
+              </a:srgbClr>
+            </a:outerShdw>
+          </a:effectLst>
+        </p:spPr>
+        <p:style>
+          <a:lnRef idx="1">
+            <a:schemeClr val="accent1"/>
+          </a:lnRef>
+          <a:fillRef idx="3">
+            <a:schemeClr val="accent1"/>
+          </a:fillRef>
+          <a:effectRef idx="2">
+            <a:schemeClr val="accent1"/>
+          </a:effectRef>
+          <a:fontRef idx="minor">
+            <a:schemeClr val="lt1"/>
+          </a:fontRef>
+        </p:style>
+        <p:txBody>
+          <a:bodyPr rtlCol="0" anchor="ctr"/>
+          <a:lstStyle/>
+          <a:p>
+            <a:pPr algn="ctr"/>
+          </a:p>
+        </p:txBody>
+      </p:sp>
+      <p:sp>
+        <p:nvSpPr>
+          <p:cNvPr id="12" name="Rounded Rectangle 11"/>
+          <p:cNvSpPr/>
+          <p:nvPr/>
+        </p:nvSpPr>
+        <p:spPr>
+          <a:xfrm>
+            <a:off x="731519" y="1508760"/>
+            <a:ext cx="10728655" cy="32004"/>
+          </a:xfrm>
+          <a:prstGeom prst="roundRect">
+            <a:avLst>
+              <a:gd name="adj" fmla="val 50000"/>
+            </a:avLst>
+          </a:prstGeom>
+          <a:solidFill>
+            <a:srgbClr val="FFFFFF">
+              <a:alpha val="85000"/>
+            </a:srgbClr>
+          </a:solidFill>
+          <a:ln>
+            <a:noFill/>
+          </a:ln>
+          <a:effectLst/>
+        </p:spPr>
+        <p:style>
+          <a:lnRef idx="1">
+            <a:schemeClr val="accent1"/>
+          </a:lnRef>
+          <a:fillRef idx="3">
+            <a:schemeClr val="accent1"/>
+          </a:fillRef>
+          <a:effectRef idx="2">
+            <a:schemeClr val="accent1"/>
+          </a:effectRef>
+          <a:fontRef idx="minor">
+            <a:schemeClr val="lt1"/>
+          </a:fontRef>
+        </p:style>
+        <p:txBody>
+          <a:bodyPr rtlCol="0" anchor="ctr"/>
+          <a:lstStyle/>
+          <a:p>
+            <a:pPr algn="ctr"/>
+          </a:p>
+        </p:txBody>
+      </p:sp>
+      <p:sp>
+        <p:nvSpPr>
+          <p:cNvPr id="13" name="TextBox 12"/>
           <p:cNvSpPr txBox="1"/>
           <p:nvPr/>
         </p:nvSpPr>
@@ -16580,7 +18168,7 @@
       </p:sp>
       <p:sp>
         <p:nvSpPr>
-          <p:cNvPr id="12" name="Rounded Rectangle 11"/>
+          <p:cNvPr id="14" name="Rounded Rectangle 13"/>
           <p:cNvSpPr/>
           <p:nvPr/>
         </p:nvSpPr>
@@ -16636,7 +18224,7 @@
       </p:sp>
       <p:sp>
         <p:nvSpPr>
-          <p:cNvPr id="13" name="Oval 12"/>
+          <p:cNvPr id="15" name="Oval 14"/>
           <p:cNvSpPr/>
           <p:nvPr/>
         </p:nvSpPr>
@@ -16689,7 +18277,7 @@
       </p:sp>
       <p:sp>
         <p:nvSpPr>
-          <p:cNvPr id="14" name="TextBox 13"/>
+          <p:cNvPr id="16" name="TextBox 15"/>
           <p:cNvSpPr txBox="1"/>
           <p:nvPr/>
         </p:nvSpPr>
@@ -16723,7 +18311,7 @@
       </p:sp>
       <p:sp>
         <p:nvSpPr>
-          <p:cNvPr id="15" name="Rounded Rectangle 14"/>
+          <p:cNvPr id="17" name="Rounded Rectangle 16"/>
           <p:cNvSpPr/>
           <p:nvPr/>
         </p:nvSpPr>
@@ -16779,7 +18367,7 @@
       </p:sp>
       <p:sp>
         <p:nvSpPr>
-          <p:cNvPr id="16" name="Oval 15"/>
+          <p:cNvPr id="18" name="Oval 17"/>
           <p:cNvSpPr/>
           <p:nvPr/>
         </p:nvSpPr>
@@ -16832,7 +18420,7 @@
       </p:sp>
       <p:sp>
         <p:nvSpPr>
-          <p:cNvPr id="17" name="TextBox 16"/>
+          <p:cNvPr id="19" name="TextBox 18"/>
           <p:cNvSpPr txBox="1"/>
           <p:nvPr/>
         </p:nvSpPr>
@@ -16866,7 +18454,7 @@
       </p:sp>
       <p:sp>
         <p:nvSpPr>
-          <p:cNvPr id="18" name="Rounded Rectangle 17"/>
+          <p:cNvPr id="20" name="Rounded Rectangle 19"/>
           <p:cNvSpPr/>
           <p:nvPr/>
         </p:nvSpPr>
@@ -16925,7 +18513,7 @@
       </p:sp>
       <p:sp>
         <p:nvSpPr>
-          <p:cNvPr id="19" name="Oval 18"/>
+          <p:cNvPr id="21" name="Oval 20"/>
           <p:cNvSpPr/>
           <p:nvPr/>
         </p:nvSpPr>
@@ -16978,7 +18566,7 @@
       </p:sp>
       <p:sp>
         <p:nvSpPr>
-          <p:cNvPr id="20" name="TextBox 19"/>
+          <p:cNvPr id="22" name="TextBox 21"/>
           <p:cNvSpPr txBox="1"/>
           <p:nvPr/>
         </p:nvSpPr>
@@ -17012,7 +18600,7 @@
       </p:sp>
       <p:sp>
         <p:nvSpPr>
-          <p:cNvPr id="21" name="Rounded Rectangle 20"/>
+          <p:cNvPr id="23" name="Rounded Rectangle 22"/>
           <p:cNvSpPr/>
           <p:nvPr/>
         </p:nvSpPr>
@@ -17068,7 +18656,7 @@
       </p:sp>
       <p:sp>
         <p:nvSpPr>
-          <p:cNvPr id="22" name="Oval 21"/>
+          <p:cNvPr id="24" name="Oval 23"/>
           <p:cNvSpPr/>
           <p:nvPr/>
         </p:nvSpPr>
@@ -17121,7 +18709,7 @@
       </p:sp>
       <p:sp>
         <p:nvSpPr>
-          <p:cNvPr id="23" name="TextBox 22"/>
+          <p:cNvPr id="25" name="TextBox 24"/>
           <p:cNvSpPr txBox="1"/>
           <p:nvPr/>
         </p:nvSpPr>
@@ -17155,7 +18743,7 @@
       </p:sp>
       <p:sp>
         <p:nvSpPr>
-          <p:cNvPr id="24" name="TextBox 23"/>
+          <p:cNvPr id="26" name="TextBox 25"/>
           <p:cNvSpPr txBox="1"/>
           <p:nvPr/>
         </p:nvSpPr>
@@ -17579,7 +19167,111 @@
       </p:pic>
       <p:sp>
         <p:nvSpPr>
-          <p:cNvPr id="11" name="TextBox 10"/>
+          <p:cNvPr id="11" name="Rounded Rectangle 10"/>
+          <p:cNvSpPr/>
+          <p:nvPr/>
+        </p:nvSpPr>
+        <p:spPr>
+          <a:xfrm>
+            <a:off x="411479" y="1444752"/>
+            <a:ext cx="11368735" cy="4800600"/>
+          </a:xfrm>
+          <a:prstGeom prst="roundRect">
+            <a:avLst>
+              <a:gd name="adj" fmla="val 4000"/>
+            </a:avLst>
+          </a:prstGeom>
+          <a:solidFill>
+            <a:srgbClr val="FFFFFF">
+              <a:alpha val="84000"/>
+            </a:srgbClr>
+          </a:solidFill>
+          <a:ln w="19050">
+            <a:solidFill>
+              <a:srgbClr val="FFFFFF"/>
+            </a:solidFill>
+          </a:ln>
+          <a:effectLst>
+            <a:outerShdw blurRad="203200" dist="50800" dir="5400000" algn="t" rotWithShape="0">
+              <a:srgbClr val="1A2340">
+                <a:alpha val="20000"/>
+              </a:srgbClr>
+            </a:outerShdw>
+          </a:effectLst>
+        </p:spPr>
+        <p:style>
+          <a:lnRef idx="1">
+            <a:schemeClr val="accent1"/>
+          </a:lnRef>
+          <a:fillRef idx="3">
+            <a:schemeClr val="accent1"/>
+          </a:fillRef>
+          <a:effectRef idx="2">
+            <a:schemeClr val="accent1"/>
+          </a:effectRef>
+          <a:fontRef idx="minor">
+            <a:schemeClr val="lt1"/>
+          </a:fontRef>
+        </p:style>
+        <p:txBody>
+          <a:bodyPr rtlCol="0" anchor="ctr"/>
+          <a:lstStyle/>
+          <a:p>
+            <a:pPr algn="ctr"/>
+          </a:p>
+        </p:txBody>
+      </p:sp>
+      <p:sp>
+        <p:nvSpPr>
+          <p:cNvPr id="12" name="Rounded Rectangle 11"/>
+          <p:cNvSpPr/>
+          <p:nvPr/>
+        </p:nvSpPr>
+        <p:spPr>
+          <a:xfrm>
+            <a:off x="731519" y="1508760"/>
+            <a:ext cx="10728655" cy="32004"/>
+          </a:xfrm>
+          <a:prstGeom prst="roundRect">
+            <a:avLst>
+              <a:gd name="adj" fmla="val 50000"/>
+            </a:avLst>
+          </a:prstGeom>
+          <a:solidFill>
+            <a:srgbClr val="FFFFFF">
+              <a:alpha val="85000"/>
+            </a:srgbClr>
+          </a:solidFill>
+          <a:ln>
+            <a:noFill/>
+          </a:ln>
+          <a:effectLst/>
+        </p:spPr>
+        <p:style>
+          <a:lnRef idx="1">
+            <a:schemeClr val="accent1"/>
+          </a:lnRef>
+          <a:fillRef idx="3">
+            <a:schemeClr val="accent1"/>
+          </a:fillRef>
+          <a:effectRef idx="2">
+            <a:schemeClr val="accent1"/>
+          </a:effectRef>
+          <a:fontRef idx="minor">
+            <a:schemeClr val="lt1"/>
+          </a:fontRef>
+        </p:style>
+        <p:txBody>
+          <a:bodyPr rtlCol="0" anchor="ctr"/>
+          <a:lstStyle/>
+          <a:p>
+            <a:pPr algn="ctr"/>
+          </a:p>
+        </p:txBody>
+      </p:sp>
+      <p:sp>
+        <p:nvSpPr>
+          <p:cNvPr id="13" name="TextBox 12"/>
           <p:cNvSpPr txBox="1"/>
           <p:nvPr/>
         </p:nvSpPr>
@@ -17613,7 +19305,7 @@
       </p:sp>
       <p:sp>
         <p:nvSpPr>
-          <p:cNvPr id="12" name="Rounded Rectangle 11"/>
+          <p:cNvPr id="14" name="Rounded Rectangle 13"/>
           <p:cNvSpPr/>
           <p:nvPr/>
         </p:nvSpPr>
@@ -17669,7 +19361,7 @@
       </p:sp>
       <p:sp>
         <p:nvSpPr>
-          <p:cNvPr id="13" name="Oval 12"/>
+          <p:cNvPr id="15" name="Oval 14"/>
           <p:cNvSpPr/>
           <p:nvPr/>
         </p:nvSpPr>
@@ -17722,7 +19414,7 @@
       </p:sp>
       <p:sp>
         <p:nvSpPr>
-          <p:cNvPr id="14" name="TextBox 13"/>
+          <p:cNvPr id="16" name="TextBox 15"/>
           <p:cNvSpPr txBox="1"/>
           <p:nvPr/>
         </p:nvSpPr>
@@ -17756,7 +19448,7 @@
       </p:sp>
       <p:sp>
         <p:nvSpPr>
-          <p:cNvPr id="15" name="Rounded Rectangle 14"/>
+          <p:cNvPr id="17" name="Rounded Rectangle 16"/>
           <p:cNvSpPr/>
           <p:nvPr/>
         </p:nvSpPr>
@@ -17812,7 +19504,7 @@
       </p:sp>
       <p:sp>
         <p:nvSpPr>
-          <p:cNvPr id="16" name="Oval 15"/>
+          <p:cNvPr id="18" name="Oval 17"/>
           <p:cNvSpPr/>
           <p:nvPr/>
         </p:nvSpPr>
@@ -17865,7 +19557,7 @@
       </p:sp>
       <p:sp>
         <p:nvSpPr>
-          <p:cNvPr id="17" name="TextBox 16"/>
+          <p:cNvPr id="19" name="TextBox 18"/>
           <p:cNvSpPr txBox="1"/>
           <p:nvPr/>
         </p:nvSpPr>
@@ -17899,7 +19591,7 @@
       </p:sp>
       <p:sp>
         <p:nvSpPr>
-          <p:cNvPr id="18" name="Rounded Rectangle 17"/>
+          <p:cNvPr id="20" name="Rounded Rectangle 19"/>
           <p:cNvSpPr/>
           <p:nvPr/>
         </p:nvSpPr>
@@ -17955,7 +19647,7 @@
       </p:sp>
       <p:sp>
         <p:nvSpPr>
-          <p:cNvPr id="19" name="Oval 18"/>
+          <p:cNvPr id="21" name="Oval 20"/>
           <p:cNvSpPr/>
           <p:nvPr/>
         </p:nvSpPr>
@@ -18008,7 +19700,7 @@
       </p:sp>
       <p:sp>
         <p:nvSpPr>
-          <p:cNvPr id="20" name="TextBox 19"/>
+          <p:cNvPr id="22" name="TextBox 21"/>
           <p:cNvSpPr txBox="1"/>
           <p:nvPr/>
         </p:nvSpPr>
@@ -18042,7 +19734,7 @@
       </p:sp>
       <p:sp>
         <p:nvSpPr>
-          <p:cNvPr id="21" name="Rounded Rectangle 20"/>
+          <p:cNvPr id="23" name="Rounded Rectangle 22"/>
           <p:cNvSpPr/>
           <p:nvPr/>
         </p:nvSpPr>
@@ -18098,7 +19790,7 @@
       </p:sp>
       <p:sp>
         <p:nvSpPr>
-          <p:cNvPr id="22" name="Oval 21"/>
+          <p:cNvPr id="24" name="Oval 23"/>
           <p:cNvSpPr/>
           <p:nvPr/>
         </p:nvSpPr>
@@ -18151,7 +19843,7 @@
       </p:sp>
       <p:sp>
         <p:nvSpPr>
-          <p:cNvPr id="23" name="TextBox 22"/>
+          <p:cNvPr id="25" name="TextBox 24"/>
           <p:cNvSpPr txBox="1"/>
           <p:nvPr/>
         </p:nvSpPr>
@@ -18566,7 +20258,111 @@
       </p:pic>
       <p:sp>
         <p:nvSpPr>
-          <p:cNvPr id="11" name="TextBox 10"/>
+          <p:cNvPr id="11" name="Rounded Rectangle 10"/>
+          <p:cNvSpPr/>
+          <p:nvPr/>
+        </p:nvSpPr>
+        <p:spPr>
+          <a:xfrm>
+            <a:off x="411479" y="1444752"/>
+            <a:ext cx="11368735" cy="4800600"/>
+          </a:xfrm>
+          <a:prstGeom prst="roundRect">
+            <a:avLst>
+              <a:gd name="adj" fmla="val 4000"/>
+            </a:avLst>
+          </a:prstGeom>
+          <a:solidFill>
+            <a:srgbClr val="FFFFFF">
+              <a:alpha val="84000"/>
+            </a:srgbClr>
+          </a:solidFill>
+          <a:ln w="19050">
+            <a:solidFill>
+              <a:srgbClr val="FFFFFF"/>
+            </a:solidFill>
+          </a:ln>
+          <a:effectLst>
+            <a:outerShdw blurRad="203200" dist="50800" dir="5400000" algn="t" rotWithShape="0">
+              <a:srgbClr val="1A2340">
+                <a:alpha val="20000"/>
+              </a:srgbClr>
+            </a:outerShdw>
+          </a:effectLst>
+        </p:spPr>
+        <p:style>
+          <a:lnRef idx="1">
+            <a:schemeClr val="accent1"/>
+          </a:lnRef>
+          <a:fillRef idx="3">
+            <a:schemeClr val="accent1"/>
+          </a:fillRef>
+          <a:effectRef idx="2">
+            <a:schemeClr val="accent1"/>
+          </a:effectRef>
+          <a:fontRef idx="minor">
+            <a:schemeClr val="lt1"/>
+          </a:fontRef>
+        </p:style>
+        <p:txBody>
+          <a:bodyPr rtlCol="0" anchor="ctr"/>
+          <a:lstStyle/>
+          <a:p>
+            <a:pPr algn="ctr"/>
+          </a:p>
+        </p:txBody>
+      </p:sp>
+      <p:sp>
+        <p:nvSpPr>
+          <p:cNvPr id="12" name="Rounded Rectangle 11"/>
+          <p:cNvSpPr/>
+          <p:nvPr/>
+        </p:nvSpPr>
+        <p:spPr>
+          <a:xfrm>
+            <a:off x="731519" y="1508760"/>
+            <a:ext cx="10728655" cy="32004"/>
+          </a:xfrm>
+          <a:prstGeom prst="roundRect">
+            <a:avLst>
+              <a:gd name="adj" fmla="val 50000"/>
+            </a:avLst>
+          </a:prstGeom>
+          <a:solidFill>
+            <a:srgbClr val="FFFFFF">
+              <a:alpha val="85000"/>
+            </a:srgbClr>
+          </a:solidFill>
+          <a:ln>
+            <a:noFill/>
+          </a:ln>
+          <a:effectLst/>
+        </p:spPr>
+        <p:style>
+          <a:lnRef idx="1">
+            <a:schemeClr val="accent1"/>
+          </a:lnRef>
+          <a:fillRef idx="3">
+            <a:schemeClr val="accent1"/>
+          </a:fillRef>
+          <a:effectRef idx="2">
+            <a:schemeClr val="accent1"/>
+          </a:effectRef>
+          <a:fontRef idx="minor">
+            <a:schemeClr val="lt1"/>
+          </a:fontRef>
+        </p:style>
+        <p:txBody>
+          <a:bodyPr rtlCol="0" anchor="ctr"/>
+          <a:lstStyle/>
+          <a:p>
+            <a:pPr algn="ctr"/>
+          </a:p>
+        </p:txBody>
+      </p:sp>
+      <p:sp>
+        <p:nvSpPr>
+          <p:cNvPr id="13" name="TextBox 12"/>
           <p:cNvSpPr txBox="1"/>
           <p:nvPr/>
         </p:nvSpPr>
@@ -18600,7 +20396,7 @@
       </p:sp>
       <p:sp>
         <p:nvSpPr>
-          <p:cNvPr id="12" name="Rounded Rectangle 11"/>
+          <p:cNvPr id="14" name="Rounded Rectangle 13"/>
           <p:cNvSpPr/>
           <p:nvPr/>
         </p:nvSpPr>
@@ -18656,7 +20452,7 @@
       </p:sp>
       <p:sp>
         <p:nvSpPr>
-          <p:cNvPr id="13" name="Oval 12"/>
+          <p:cNvPr id="15" name="Oval 14"/>
           <p:cNvSpPr/>
           <p:nvPr/>
         </p:nvSpPr>
@@ -18709,7 +20505,7 @@
       </p:sp>
       <p:sp>
         <p:nvSpPr>
-          <p:cNvPr id="14" name="TextBox 13"/>
+          <p:cNvPr id="16" name="TextBox 15"/>
           <p:cNvSpPr txBox="1"/>
           <p:nvPr/>
         </p:nvSpPr>
@@ -18743,7 +20539,7 @@
       </p:sp>
       <p:sp>
         <p:nvSpPr>
-          <p:cNvPr id="15" name="Rounded Rectangle 14"/>
+          <p:cNvPr id="17" name="Rounded Rectangle 16"/>
           <p:cNvSpPr/>
           <p:nvPr/>
         </p:nvSpPr>
@@ -18802,7 +20598,7 @@
       </p:sp>
       <p:sp>
         <p:nvSpPr>
-          <p:cNvPr id="16" name="Oval 15"/>
+          <p:cNvPr id="18" name="Oval 17"/>
           <p:cNvSpPr/>
           <p:nvPr/>
         </p:nvSpPr>
@@ -18855,7 +20651,7 @@
       </p:sp>
       <p:sp>
         <p:nvSpPr>
-          <p:cNvPr id="17" name="TextBox 16"/>
+          <p:cNvPr id="19" name="TextBox 18"/>
           <p:cNvSpPr txBox="1"/>
           <p:nvPr/>
         </p:nvSpPr>
@@ -18889,7 +20685,7 @@
       </p:sp>
       <p:sp>
         <p:nvSpPr>
-          <p:cNvPr id="18" name="Rounded Rectangle 17"/>
+          <p:cNvPr id="20" name="Rounded Rectangle 19"/>
           <p:cNvSpPr/>
           <p:nvPr/>
         </p:nvSpPr>
@@ -18945,7 +20741,7 @@
       </p:sp>
       <p:sp>
         <p:nvSpPr>
-          <p:cNvPr id="19" name="Oval 18"/>
+          <p:cNvPr id="21" name="Oval 20"/>
           <p:cNvSpPr/>
           <p:nvPr/>
         </p:nvSpPr>
@@ -18998,7 +20794,7 @@
       </p:sp>
       <p:sp>
         <p:nvSpPr>
-          <p:cNvPr id="20" name="TextBox 19"/>
+          <p:cNvPr id="22" name="TextBox 21"/>
           <p:cNvSpPr txBox="1"/>
           <p:nvPr/>
         </p:nvSpPr>
@@ -19032,7 +20828,7 @@
       </p:sp>
       <p:sp>
         <p:nvSpPr>
-          <p:cNvPr id="21" name="Rounded Rectangle 20"/>
+          <p:cNvPr id="23" name="Rounded Rectangle 22"/>
           <p:cNvSpPr/>
           <p:nvPr/>
         </p:nvSpPr>
@@ -19088,7 +20884,7 @@
       </p:sp>
       <p:sp>
         <p:nvSpPr>
-          <p:cNvPr id="22" name="Oval 21"/>
+          <p:cNvPr id="24" name="Oval 23"/>
           <p:cNvSpPr/>
           <p:nvPr/>
         </p:nvSpPr>
@@ -19141,7 +20937,7 @@
       </p:sp>
       <p:sp>
         <p:nvSpPr>
-          <p:cNvPr id="23" name="TextBox 22"/>
+          <p:cNvPr id="25" name="TextBox 24"/>
           <p:cNvSpPr txBox="1"/>
           <p:nvPr/>
         </p:nvSpPr>
@@ -19175,7 +20971,7 @@
       </p:sp>
       <p:sp>
         <p:nvSpPr>
-          <p:cNvPr id="24" name="TextBox 23"/>
+          <p:cNvPr id="26" name="TextBox 25"/>
           <p:cNvSpPr txBox="1"/>
           <p:nvPr/>
         </p:nvSpPr>
@@ -20374,7 +22170,111 @@
       </p:pic>
       <p:sp>
         <p:nvSpPr>
-          <p:cNvPr id="11" name="Oval 10"/>
+          <p:cNvPr id="11" name="Rounded Rectangle 10"/>
+          <p:cNvSpPr/>
+          <p:nvPr/>
+        </p:nvSpPr>
+        <p:spPr>
+          <a:xfrm>
+            <a:off x="411479" y="1444752"/>
+            <a:ext cx="11368735" cy="4800600"/>
+          </a:xfrm>
+          <a:prstGeom prst="roundRect">
+            <a:avLst>
+              <a:gd name="adj" fmla="val 4000"/>
+            </a:avLst>
+          </a:prstGeom>
+          <a:solidFill>
+            <a:srgbClr val="FFFFFF">
+              <a:alpha val="84000"/>
+            </a:srgbClr>
+          </a:solidFill>
+          <a:ln w="19050">
+            <a:solidFill>
+              <a:srgbClr val="FFFFFF"/>
+            </a:solidFill>
+          </a:ln>
+          <a:effectLst>
+            <a:outerShdw blurRad="203200" dist="50800" dir="5400000" algn="t" rotWithShape="0">
+              <a:srgbClr val="1A2340">
+                <a:alpha val="20000"/>
+              </a:srgbClr>
+            </a:outerShdw>
+          </a:effectLst>
+        </p:spPr>
+        <p:style>
+          <a:lnRef idx="1">
+            <a:schemeClr val="accent1"/>
+          </a:lnRef>
+          <a:fillRef idx="3">
+            <a:schemeClr val="accent1"/>
+          </a:fillRef>
+          <a:effectRef idx="2">
+            <a:schemeClr val="accent1"/>
+          </a:effectRef>
+          <a:fontRef idx="minor">
+            <a:schemeClr val="lt1"/>
+          </a:fontRef>
+        </p:style>
+        <p:txBody>
+          <a:bodyPr rtlCol="0" anchor="ctr"/>
+          <a:lstStyle/>
+          <a:p>
+            <a:pPr algn="ctr"/>
+          </a:p>
+        </p:txBody>
+      </p:sp>
+      <p:sp>
+        <p:nvSpPr>
+          <p:cNvPr id="12" name="Rounded Rectangle 11"/>
+          <p:cNvSpPr/>
+          <p:nvPr/>
+        </p:nvSpPr>
+        <p:spPr>
+          <a:xfrm>
+            <a:off x="731519" y="1508760"/>
+            <a:ext cx="10728655" cy="32004"/>
+          </a:xfrm>
+          <a:prstGeom prst="roundRect">
+            <a:avLst>
+              <a:gd name="adj" fmla="val 50000"/>
+            </a:avLst>
+          </a:prstGeom>
+          <a:solidFill>
+            <a:srgbClr val="FFFFFF">
+              <a:alpha val="85000"/>
+            </a:srgbClr>
+          </a:solidFill>
+          <a:ln>
+            <a:noFill/>
+          </a:ln>
+          <a:effectLst/>
+        </p:spPr>
+        <p:style>
+          <a:lnRef idx="1">
+            <a:schemeClr val="accent1"/>
+          </a:lnRef>
+          <a:fillRef idx="3">
+            <a:schemeClr val="accent1"/>
+          </a:fillRef>
+          <a:effectRef idx="2">
+            <a:schemeClr val="accent1"/>
+          </a:effectRef>
+          <a:fontRef idx="minor">
+            <a:schemeClr val="lt1"/>
+          </a:fontRef>
+        </p:style>
+        <p:txBody>
+          <a:bodyPr rtlCol="0" anchor="ctr"/>
+          <a:lstStyle/>
+          <a:p>
+            <a:pPr algn="ctr"/>
+          </a:p>
+        </p:txBody>
+      </p:sp>
+      <p:sp>
+        <p:nvSpPr>
+          <p:cNvPr id="13" name="Oval 12"/>
           <p:cNvSpPr/>
           <p:nvPr/>
         </p:nvSpPr>
@@ -20427,7 +22327,7 @@
       </p:sp>
       <p:sp>
         <p:nvSpPr>
-          <p:cNvPr id="12" name="TextBox 11"/>
+          <p:cNvPr id="14" name="TextBox 13"/>
           <p:cNvSpPr txBox="1"/>
           <p:nvPr/>
         </p:nvSpPr>
@@ -20461,7 +22361,7 @@
       </p:sp>
       <p:sp>
         <p:nvSpPr>
-          <p:cNvPr id="13" name="Oval 12"/>
+          <p:cNvPr id="15" name="Oval 14"/>
           <p:cNvSpPr/>
           <p:nvPr/>
         </p:nvSpPr>
@@ -20514,7 +22414,7 @@
       </p:sp>
       <p:sp>
         <p:nvSpPr>
-          <p:cNvPr id="14" name="TextBox 13"/>
+          <p:cNvPr id="16" name="TextBox 15"/>
           <p:cNvSpPr txBox="1"/>
           <p:nvPr/>
         </p:nvSpPr>
@@ -20548,7 +22448,7 @@
       </p:sp>
       <p:sp>
         <p:nvSpPr>
-          <p:cNvPr id="15" name="Oval 14"/>
+          <p:cNvPr id="17" name="Oval 16"/>
           <p:cNvSpPr/>
           <p:nvPr/>
         </p:nvSpPr>
@@ -20601,7 +22501,7 @@
       </p:sp>
       <p:sp>
         <p:nvSpPr>
-          <p:cNvPr id="16" name="TextBox 15"/>
+          <p:cNvPr id="18" name="TextBox 17"/>
           <p:cNvSpPr txBox="1"/>
           <p:nvPr/>
         </p:nvSpPr>
@@ -20635,7 +22535,7 @@
       </p:sp>
       <p:sp>
         <p:nvSpPr>
-          <p:cNvPr id="17" name="Oval 16"/>
+          <p:cNvPr id="19" name="Oval 18"/>
           <p:cNvSpPr/>
           <p:nvPr/>
         </p:nvSpPr>
@@ -20688,7 +22588,7 @@
       </p:sp>
       <p:sp>
         <p:nvSpPr>
-          <p:cNvPr id="18" name="TextBox 17"/>
+          <p:cNvPr id="20" name="TextBox 19"/>
           <p:cNvSpPr txBox="1"/>
           <p:nvPr/>
         </p:nvSpPr>
@@ -20722,7 +22622,7 @@
       </p:sp>
       <p:sp>
         <p:nvSpPr>
-          <p:cNvPr id="19" name="Oval 18"/>
+          <p:cNvPr id="21" name="Oval 20"/>
           <p:cNvSpPr/>
           <p:nvPr/>
         </p:nvSpPr>
@@ -20775,7 +22675,7 @@
       </p:sp>
       <p:sp>
         <p:nvSpPr>
-          <p:cNvPr id="20" name="TextBox 19"/>
+          <p:cNvPr id="22" name="TextBox 21"/>
           <p:cNvSpPr txBox="1"/>
           <p:nvPr/>
         </p:nvSpPr>
@@ -20809,7 +22709,7 @@
       </p:sp>
       <p:sp>
         <p:nvSpPr>
-          <p:cNvPr id="21" name="Oval 20"/>
+          <p:cNvPr id="23" name="Oval 22"/>
           <p:cNvSpPr/>
           <p:nvPr/>
         </p:nvSpPr>
@@ -20862,7 +22762,7 @@
       </p:sp>
       <p:sp>
         <p:nvSpPr>
-          <p:cNvPr id="22" name="TextBox 21"/>
+          <p:cNvPr id="24" name="TextBox 23"/>
           <p:cNvSpPr txBox="1"/>
           <p:nvPr/>
         </p:nvSpPr>
@@ -20896,7 +22796,7 @@
       </p:sp>
       <p:sp>
         <p:nvSpPr>
-          <p:cNvPr id="23" name="Oval 22"/>
+          <p:cNvPr id="25" name="Oval 24"/>
           <p:cNvSpPr/>
           <p:nvPr/>
         </p:nvSpPr>
@@ -20949,7 +22849,7 @@
       </p:sp>
       <p:sp>
         <p:nvSpPr>
-          <p:cNvPr id="24" name="TextBox 23"/>
+          <p:cNvPr id="26" name="TextBox 25"/>
           <p:cNvSpPr txBox="1"/>
           <p:nvPr/>
         </p:nvSpPr>
@@ -20983,7 +22883,7 @@
       </p:sp>
       <p:sp>
         <p:nvSpPr>
-          <p:cNvPr id="25" name="Oval 24"/>
+          <p:cNvPr id="27" name="Oval 26"/>
           <p:cNvSpPr/>
           <p:nvPr/>
         </p:nvSpPr>
@@ -21036,7 +22936,7 @@
       </p:sp>
       <p:sp>
         <p:nvSpPr>
-          <p:cNvPr id="26" name="TextBox 25"/>
+          <p:cNvPr id="28" name="TextBox 27"/>
           <p:cNvSpPr txBox="1"/>
           <p:nvPr/>
         </p:nvSpPr>
@@ -21070,7 +22970,7 @@
       </p:sp>
       <p:sp>
         <p:nvSpPr>
-          <p:cNvPr id="27" name="Oval 26"/>
+          <p:cNvPr id="29" name="Oval 28"/>
           <p:cNvSpPr/>
           <p:nvPr/>
         </p:nvSpPr>
@@ -21123,7 +23023,7 @@
       </p:sp>
       <p:sp>
         <p:nvSpPr>
-          <p:cNvPr id="28" name="TextBox 27"/>
+          <p:cNvPr id="30" name="TextBox 29"/>
           <p:cNvSpPr txBox="1"/>
           <p:nvPr/>
         </p:nvSpPr>
@@ -21157,7 +23057,7 @@
       </p:sp>
       <p:sp>
         <p:nvSpPr>
-          <p:cNvPr id="29" name="Oval 28"/>
+          <p:cNvPr id="31" name="Oval 30"/>
           <p:cNvSpPr/>
           <p:nvPr/>
         </p:nvSpPr>
@@ -21210,7 +23110,7 @@
       </p:sp>
       <p:sp>
         <p:nvSpPr>
-          <p:cNvPr id="30" name="TextBox 29"/>
+          <p:cNvPr id="32" name="TextBox 31"/>
           <p:cNvSpPr txBox="1"/>
           <p:nvPr/>
         </p:nvSpPr>
@@ -21244,7 +23144,7 @@
       </p:sp>
       <p:sp>
         <p:nvSpPr>
-          <p:cNvPr id="31" name="Oval 30"/>
+          <p:cNvPr id="33" name="Oval 32"/>
           <p:cNvSpPr/>
           <p:nvPr/>
         </p:nvSpPr>
@@ -21297,7 +23197,7 @@
       </p:sp>
       <p:sp>
         <p:nvSpPr>
-          <p:cNvPr id="32" name="TextBox 31"/>
+          <p:cNvPr id="34" name="TextBox 33"/>
           <p:cNvSpPr txBox="1"/>
           <p:nvPr/>
         </p:nvSpPr>
@@ -21331,7 +23231,7 @@
       </p:sp>
       <p:sp>
         <p:nvSpPr>
-          <p:cNvPr id="33" name="Oval 32"/>
+          <p:cNvPr id="35" name="Oval 34"/>
           <p:cNvSpPr/>
           <p:nvPr/>
         </p:nvSpPr>
@@ -21384,7 +23284,7 @@
       </p:sp>
       <p:sp>
         <p:nvSpPr>
-          <p:cNvPr id="34" name="TextBox 33"/>
+          <p:cNvPr id="36" name="TextBox 35"/>
           <p:cNvSpPr txBox="1"/>
           <p:nvPr/>
         </p:nvSpPr>
@@ -21418,7 +23318,7 @@
       </p:sp>
       <p:sp>
         <p:nvSpPr>
-          <p:cNvPr id="35" name="Oval 34"/>
+          <p:cNvPr id="37" name="Oval 36"/>
           <p:cNvSpPr/>
           <p:nvPr/>
         </p:nvSpPr>
@@ -21471,7 +23371,7 @@
       </p:sp>
       <p:sp>
         <p:nvSpPr>
-          <p:cNvPr id="36" name="TextBox 35"/>
+          <p:cNvPr id="38" name="TextBox 37"/>
           <p:cNvSpPr txBox="1"/>
           <p:nvPr/>
         </p:nvSpPr>
@@ -21505,7 +23405,7 @@
       </p:sp>
       <p:sp>
         <p:nvSpPr>
-          <p:cNvPr id="37" name="Oval 36"/>
+          <p:cNvPr id="39" name="Oval 38"/>
           <p:cNvSpPr/>
           <p:nvPr/>
         </p:nvSpPr>
@@ -21558,7 +23458,7 @@
       </p:sp>
       <p:sp>
         <p:nvSpPr>
-          <p:cNvPr id="38" name="TextBox 37"/>
+          <p:cNvPr id="40" name="TextBox 39"/>
           <p:cNvSpPr txBox="1"/>
           <p:nvPr/>
         </p:nvSpPr>
@@ -21973,14 +23873,177 @@
       </p:pic>
       <p:sp>
         <p:nvSpPr>
-          <p:cNvPr id="11" name="TextBox 10"/>
+          <p:cNvPr id="11" name="Rounded Rectangle 10"/>
+          <p:cNvSpPr/>
+          <p:nvPr/>
+        </p:nvSpPr>
+        <p:spPr>
+          <a:xfrm>
+            <a:off x="411479" y="1444752"/>
+            <a:ext cx="11368735" cy="4800600"/>
+          </a:xfrm>
+          <a:prstGeom prst="roundRect">
+            <a:avLst>
+              <a:gd name="adj" fmla="val 4000"/>
+            </a:avLst>
+          </a:prstGeom>
+          <a:solidFill>
+            <a:srgbClr val="FFFFFF">
+              <a:alpha val="84000"/>
+            </a:srgbClr>
+          </a:solidFill>
+          <a:ln w="19050">
+            <a:solidFill>
+              <a:srgbClr val="FFFFFF"/>
+            </a:solidFill>
+          </a:ln>
+          <a:effectLst>
+            <a:outerShdw blurRad="203200" dist="50800" dir="5400000" algn="t" rotWithShape="0">
+              <a:srgbClr val="1A2340">
+                <a:alpha val="20000"/>
+              </a:srgbClr>
+            </a:outerShdw>
+          </a:effectLst>
+        </p:spPr>
+        <p:style>
+          <a:lnRef idx="1">
+            <a:schemeClr val="accent1"/>
+          </a:lnRef>
+          <a:fillRef idx="3">
+            <a:schemeClr val="accent1"/>
+          </a:fillRef>
+          <a:effectRef idx="2">
+            <a:schemeClr val="accent1"/>
+          </a:effectRef>
+          <a:fontRef idx="minor">
+            <a:schemeClr val="lt1"/>
+          </a:fontRef>
+        </p:style>
+        <p:txBody>
+          <a:bodyPr rtlCol="0" anchor="ctr"/>
+          <a:lstStyle/>
+          <a:p>
+            <a:pPr algn="ctr"/>
+          </a:p>
+        </p:txBody>
+      </p:sp>
+      <p:sp>
+        <p:nvSpPr>
+          <p:cNvPr id="12" name="Rounded Rectangle 11"/>
+          <p:cNvSpPr/>
+          <p:nvPr/>
+        </p:nvSpPr>
+        <p:spPr>
+          <a:xfrm>
+            <a:off x="731519" y="1508760"/>
+            <a:ext cx="10728655" cy="32004"/>
+          </a:xfrm>
+          <a:prstGeom prst="roundRect">
+            <a:avLst>
+              <a:gd name="adj" fmla="val 50000"/>
+            </a:avLst>
+          </a:prstGeom>
+          <a:solidFill>
+            <a:srgbClr val="FFFFFF">
+              <a:alpha val="85000"/>
+            </a:srgbClr>
+          </a:solidFill>
+          <a:ln>
+            <a:noFill/>
+          </a:ln>
+          <a:effectLst/>
+        </p:spPr>
+        <p:style>
+          <a:lnRef idx="1">
+            <a:schemeClr val="accent1"/>
+          </a:lnRef>
+          <a:fillRef idx="3">
+            <a:schemeClr val="accent1"/>
+          </a:fillRef>
+          <a:effectRef idx="2">
+            <a:schemeClr val="accent1"/>
+          </a:effectRef>
+          <a:fontRef idx="minor">
+            <a:schemeClr val="lt1"/>
+          </a:fontRef>
+        </p:style>
+        <p:txBody>
+          <a:bodyPr rtlCol="0" anchor="ctr"/>
+          <a:lstStyle/>
+          <a:p>
+            <a:pPr algn="ctr"/>
+          </a:p>
+        </p:txBody>
+      </p:sp>
+      <p:sp>
+        <p:nvSpPr>
+          <p:cNvPr id="13" name="Rounded Rectangle 12"/>
+          <p:cNvSpPr/>
+          <p:nvPr/>
+        </p:nvSpPr>
+        <p:spPr>
+          <a:xfrm>
+            <a:off x="548640" y="1591056"/>
+            <a:ext cx="64008" cy="315468"/>
+          </a:xfrm>
+          <a:prstGeom prst="roundRect">
+            <a:avLst>
+              <a:gd name="adj" fmla="val 50000"/>
+            </a:avLst>
+          </a:prstGeom>
+          <a:solidFill>
+            <a:srgbClr val="8D6A2A"/>
+          </a:solidFill>
+          <a:ln>
+            <a:noFill/>
+          </a:ln>
+          <a:effectLst>
+            <a:outerShdw blurRad="203200" dist="50800" dir="5400000" algn="t" rotWithShape="0">
+              <a:srgbClr val="1A2340">
+                <a:alpha val="20000"/>
+              </a:srgbClr>
+            </a:outerShdw>
+          </a:effectLst>
+          <a:scene3d>
+            <a:camera prst="orthographicFront"/>
+            <a:lightRig rig="threePt" dir="t"/>
+          </a:scene3d>
+          <a:sp3d>
+            <a:bevelT w="44450" h="25400" prst="softRound"/>
+          </a:sp3d>
+        </p:spPr>
+        <p:style>
+          <a:lnRef idx="1">
+            <a:schemeClr val="accent1"/>
+          </a:lnRef>
+          <a:fillRef idx="3">
+            <a:schemeClr val="accent1"/>
+          </a:fillRef>
+          <a:effectRef idx="2">
+            <a:schemeClr val="accent1"/>
+          </a:effectRef>
+          <a:fontRef idx="minor">
+            <a:schemeClr val="lt1"/>
+          </a:fontRef>
+        </p:style>
+        <p:txBody>
+          <a:bodyPr rtlCol="0" anchor="ctr"/>
+          <a:lstStyle/>
+          <a:p>
+            <a:pPr algn="ctr"/>
+          </a:p>
+        </p:txBody>
+      </p:sp>
+      <p:sp>
+        <p:nvSpPr>
+          <p:cNvPr id="14" name="TextBox 13"/>
           <p:cNvSpPr txBox="1"/>
           <p:nvPr/>
         </p:nvSpPr>
         <p:spPr>
           <a:xfrm>
-            <a:off x="548640" y="1554480"/>
-            <a:ext cx="11094415" cy="498348"/>
+            <a:off x="777240" y="1554480"/>
+            <a:ext cx="10865815" cy="498348"/>
           </a:xfrm>
           <a:prstGeom prst="rect">
             <a:avLst/>
@@ -22012,7 +24075,7 @@
       </p:sp>
       <p:graphicFrame>
         <p:nvGraphicFramePr>
-          <p:cNvPr id="12" name="Table 11"/>
+          <p:cNvPr id="15" name="Table 14"/>
           <p:cNvGraphicFramePr>
             <a:graphicFrameLocks noGrp="1"/>
           </p:cNvGraphicFramePr>
@@ -22871,14 +24934,177 @@
       </p:pic>
       <p:sp>
         <p:nvSpPr>
-          <p:cNvPr id="11" name="TextBox 10"/>
+          <p:cNvPr id="11" name="Rounded Rectangle 10"/>
+          <p:cNvSpPr/>
+          <p:nvPr/>
+        </p:nvSpPr>
+        <p:spPr>
+          <a:xfrm>
+            <a:off x="411479" y="1444752"/>
+            <a:ext cx="11368735" cy="4800600"/>
+          </a:xfrm>
+          <a:prstGeom prst="roundRect">
+            <a:avLst>
+              <a:gd name="adj" fmla="val 4000"/>
+            </a:avLst>
+          </a:prstGeom>
+          <a:solidFill>
+            <a:srgbClr val="FFFFFF">
+              <a:alpha val="84000"/>
+            </a:srgbClr>
+          </a:solidFill>
+          <a:ln w="19050">
+            <a:solidFill>
+              <a:srgbClr val="FFFFFF"/>
+            </a:solidFill>
+          </a:ln>
+          <a:effectLst>
+            <a:outerShdw blurRad="203200" dist="50800" dir="5400000" algn="t" rotWithShape="0">
+              <a:srgbClr val="1A2340">
+                <a:alpha val="20000"/>
+              </a:srgbClr>
+            </a:outerShdw>
+          </a:effectLst>
+        </p:spPr>
+        <p:style>
+          <a:lnRef idx="1">
+            <a:schemeClr val="accent1"/>
+          </a:lnRef>
+          <a:fillRef idx="3">
+            <a:schemeClr val="accent1"/>
+          </a:fillRef>
+          <a:effectRef idx="2">
+            <a:schemeClr val="accent1"/>
+          </a:effectRef>
+          <a:fontRef idx="minor">
+            <a:schemeClr val="lt1"/>
+          </a:fontRef>
+        </p:style>
+        <p:txBody>
+          <a:bodyPr rtlCol="0" anchor="ctr"/>
+          <a:lstStyle/>
+          <a:p>
+            <a:pPr algn="ctr"/>
+          </a:p>
+        </p:txBody>
+      </p:sp>
+      <p:sp>
+        <p:nvSpPr>
+          <p:cNvPr id="12" name="Rounded Rectangle 11"/>
+          <p:cNvSpPr/>
+          <p:nvPr/>
+        </p:nvSpPr>
+        <p:spPr>
+          <a:xfrm>
+            <a:off x="731519" y="1508760"/>
+            <a:ext cx="10728655" cy="32004"/>
+          </a:xfrm>
+          <a:prstGeom prst="roundRect">
+            <a:avLst>
+              <a:gd name="adj" fmla="val 50000"/>
+            </a:avLst>
+          </a:prstGeom>
+          <a:solidFill>
+            <a:srgbClr val="FFFFFF">
+              <a:alpha val="85000"/>
+            </a:srgbClr>
+          </a:solidFill>
+          <a:ln>
+            <a:noFill/>
+          </a:ln>
+          <a:effectLst/>
+        </p:spPr>
+        <p:style>
+          <a:lnRef idx="1">
+            <a:schemeClr val="accent1"/>
+          </a:lnRef>
+          <a:fillRef idx="3">
+            <a:schemeClr val="accent1"/>
+          </a:fillRef>
+          <a:effectRef idx="2">
+            <a:schemeClr val="accent1"/>
+          </a:effectRef>
+          <a:fontRef idx="minor">
+            <a:schemeClr val="lt1"/>
+          </a:fontRef>
+        </p:style>
+        <p:txBody>
+          <a:bodyPr rtlCol="0" anchor="ctr"/>
+          <a:lstStyle/>
+          <a:p>
+            <a:pPr algn="ctr"/>
+          </a:p>
+        </p:txBody>
+      </p:sp>
+      <p:sp>
+        <p:nvSpPr>
+          <p:cNvPr id="13" name="Rounded Rectangle 12"/>
+          <p:cNvSpPr/>
+          <p:nvPr/>
+        </p:nvSpPr>
+        <p:spPr>
+          <a:xfrm>
+            <a:off x="548640" y="1591056"/>
+            <a:ext cx="64008" cy="2553462"/>
+          </a:xfrm>
+          <a:prstGeom prst="roundRect">
+            <a:avLst>
+              <a:gd name="adj" fmla="val 50000"/>
+            </a:avLst>
+          </a:prstGeom>
+          <a:solidFill>
+            <a:srgbClr val="8D6A2A"/>
+          </a:solidFill>
+          <a:ln>
+            <a:noFill/>
+          </a:ln>
+          <a:effectLst>
+            <a:outerShdw blurRad="203200" dist="50800" dir="5400000" algn="t" rotWithShape="0">
+              <a:srgbClr val="1A2340">
+                <a:alpha val="20000"/>
+              </a:srgbClr>
+            </a:outerShdw>
+          </a:effectLst>
+          <a:scene3d>
+            <a:camera prst="orthographicFront"/>
+            <a:lightRig rig="threePt" dir="t"/>
+          </a:scene3d>
+          <a:sp3d>
+            <a:bevelT w="44450" h="25400" prst="softRound"/>
+          </a:sp3d>
+        </p:spPr>
+        <p:style>
+          <a:lnRef idx="1">
+            <a:schemeClr val="accent1"/>
+          </a:lnRef>
+          <a:fillRef idx="3">
+            <a:schemeClr val="accent1"/>
+          </a:fillRef>
+          <a:effectRef idx="2">
+            <a:schemeClr val="accent1"/>
+          </a:effectRef>
+          <a:fontRef idx="minor">
+            <a:schemeClr val="lt1"/>
+          </a:fontRef>
+        </p:style>
+        <p:txBody>
+          <a:bodyPr rtlCol="0" anchor="ctr"/>
+          <a:lstStyle/>
+          <a:p>
+            <a:pPr algn="ctr"/>
+          </a:p>
+        </p:txBody>
+      </p:sp>
+      <p:sp>
+        <p:nvSpPr>
+          <p:cNvPr id="14" name="TextBox 13"/>
           <p:cNvSpPr txBox="1"/>
           <p:nvPr/>
         </p:nvSpPr>
         <p:spPr>
           <a:xfrm>
-            <a:off x="548640" y="1554480"/>
-            <a:ext cx="4480560" cy="4617720"/>
+            <a:off x="777240" y="1554480"/>
+            <a:ext cx="4251960" cy="4617720"/>
           </a:xfrm>
           <a:prstGeom prst="rect">
             <a:avLst/>
@@ -22926,7 +25152,7 @@
       </p:sp>
       <p:sp>
         <p:nvSpPr>
-          <p:cNvPr id="12" name="Oval 11"/>
+          <p:cNvPr id="15" name="Oval 14"/>
           <p:cNvSpPr/>
           <p:nvPr/>
         </p:nvSpPr>
@@ -22979,7 +25205,7 @@
       </p:sp>
       <p:sp>
         <p:nvSpPr>
-          <p:cNvPr id="13" name="TextBox 12"/>
+          <p:cNvPr id="16" name="TextBox 15"/>
           <p:cNvSpPr txBox="1"/>
           <p:nvPr/>
         </p:nvSpPr>
@@ -23022,7 +25248,7 @@
       </p:sp>
       <p:sp>
         <p:nvSpPr>
-          <p:cNvPr id="14" name="Oval 13"/>
+          <p:cNvPr id="17" name="Oval 16"/>
           <p:cNvSpPr/>
           <p:nvPr/>
         </p:nvSpPr>
@@ -23075,7 +25301,7 @@
       </p:sp>
       <p:sp>
         <p:nvSpPr>
-          <p:cNvPr id="15" name="TextBox 14"/>
+          <p:cNvPr id="18" name="TextBox 17"/>
           <p:cNvSpPr txBox="1"/>
           <p:nvPr/>
         </p:nvSpPr>
@@ -23118,7 +25344,7 @@
       </p:sp>
       <p:sp>
         <p:nvSpPr>
-          <p:cNvPr id="16" name="Oval 15"/>
+          <p:cNvPr id="19" name="Oval 18"/>
           <p:cNvSpPr/>
           <p:nvPr/>
         </p:nvSpPr>
@@ -23171,7 +25397,7 @@
       </p:sp>
       <p:sp>
         <p:nvSpPr>
-          <p:cNvPr id="17" name="TextBox 16"/>
+          <p:cNvPr id="20" name="TextBox 19"/>
           <p:cNvSpPr txBox="1"/>
           <p:nvPr/>
         </p:nvSpPr>
@@ -23595,14 +25821,177 @@
       </p:pic>
       <p:sp>
         <p:nvSpPr>
-          <p:cNvPr id="11" name="TextBox 10"/>
+          <p:cNvPr id="11" name="Rounded Rectangle 10"/>
+          <p:cNvSpPr/>
+          <p:nvPr/>
+        </p:nvSpPr>
+        <p:spPr>
+          <a:xfrm>
+            <a:off x="411479" y="1444752"/>
+            <a:ext cx="11368735" cy="4800600"/>
+          </a:xfrm>
+          <a:prstGeom prst="roundRect">
+            <a:avLst>
+              <a:gd name="adj" fmla="val 4000"/>
+            </a:avLst>
+          </a:prstGeom>
+          <a:solidFill>
+            <a:srgbClr val="FFFFFF">
+              <a:alpha val="84000"/>
+            </a:srgbClr>
+          </a:solidFill>
+          <a:ln w="19050">
+            <a:solidFill>
+              <a:srgbClr val="FFFFFF"/>
+            </a:solidFill>
+          </a:ln>
+          <a:effectLst>
+            <a:outerShdw blurRad="203200" dist="50800" dir="5400000" algn="t" rotWithShape="0">
+              <a:srgbClr val="1A2340">
+                <a:alpha val="20000"/>
+              </a:srgbClr>
+            </a:outerShdw>
+          </a:effectLst>
+        </p:spPr>
+        <p:style>
+          <a:lnRef idx="1">
+            <a:schemeClr val="accent1"/>
+          </a:lnRef>
+          <a:fillRef idx="3">
+            <a:schemeClr val="accent1"/>
+          </a:fillRef>
+          <a:effectRef idx="2">
+            <a:schemeClr val="accent1"/>
+          </a:effectRef>
+          <a:fontRef idx="minor">
+            <a:schemeClr val="lt1"/>
+          </a:fontRef>
+        </p:style>
+        <p:txBody>
+          <a:bodyPr rtlCol="0" anchor="ctr"/>
+          <a:lstStyle/>
+          <a:p>
+            <a:pPr algn="ctr"/>
+          </a:p>
+        </p:txBody>
+      </p:sp>
+      <p:sp>
+        <p:nvSpPr>
+          <p:cNvPr id="12" name="Rounded Rectangle 11"/>
+          <p:cNvSpPr/>
+          <p:nvPr/>
+        </p:nvSpPr>
+        <p:spPr>
+          <a:xfrm>
+            <a:off x="731519" y="1508760"/>
+            <a:ext cx="10728655" cy="32004"/>
+          </a:xfrm>
+          <a:prstGeom prst="roundRect">
+            <a:avLst>
+              <a:gd name="adj" fmla="val 50000"/>
+            </a:avLst>
+          </a:prstGeom>
+          <a:solidFill>
+            <a:srgbClr val="FFFFFF">
+              <a:alpha val="85000"/>
+            </a:srgbClr>
+          </a:solidFill>
+          <a:ln>
+            <a:noFill/>
+          </a:ln>
+          <a:effectLst/>
+        </p:spPr>
+        <p:style>
+          <a:lnRef idx="1">
+            <a:schemeClr val="accent1"/>
+          </a:lnRef>
+          <a:fillRef idx="3">
+            <a:schemeClr val="accent1"/>
+          </a:fillRef>
+          <a:effectRef idx="2">
+            <a:schemeClr val="accent1"/>
+          </a:effectRef>
+          <a:fontRef idx="minor">
+            <a:schemeClr val="lt1"/>
+          </a:fontRef>
+        </p:style>
+        <p:txBody>
+          <a:bodyPr rtlCol="0" anchor="ctr"/>
+          <a:lstStyle/>
+          <a:p>
+            <a:pPr algn="ctr"/>
+          </a:p>
+        </p:txBody>
+      </p:sp>
+      <p:sp>
+        <p:nvSpPr>
+          <p:cNvPr id="13" name="Rounded Rectangle 12"/>
+          <p:cNvSpPr/>
+          <p:nvPr/>
+        </p:nvSpPr>
+        <p:spPr>
+          <a:xfrm>
+            <a:off x="548640" y="1591056"/>
+            <a:ext cx="64008" cy="315468"/>
+          </a:xfrm>
+          <a:prstGeom prst="roundRect">
+            <a:avLst>
+              <a:gd name="adj" fmla="val 50000"/>
+            </a:avLst>
+          </a:prstGeom>
+          <a:solidFill>
+            <a:srgbClr val="8D6A2A"/>
+          </a:solidFill>
+          <a:ln>
+            <a:noFill/>
+          </a:ln>
+          <a:effectLst>
+            <a:outerShdw blurRad="203200" dist="50800" dir="5400000" algn="t" rotWithShape="0">
+              <a:srgbClr val="1A2340">
+                <a:alpha val="20000"/>
+              </a:srgbClr>
+            </a:outerShdw>
+          </a:effectLst>
+          <a:scene3d>
+            <a:camera prst="orthographicFront"/>
+            <a:lightRig rig="threePt" dir="t"/>
+          </a:scene3d>
+          <a:sp3d>
+            <a:bevelT w="44450" h="25400" prst="softRound"/>
+          </a:sp3d>
+        </p:spPr>
+        <p:style>
+          <a:lnRef idx="1">
+            <a:schemeClr val="accent1"/>
+          </a:lnRef>
+          <a:fillRef idx="3">
+            <a:schemeClr val="accent1"/>
+          </a:fillRef>
+          <a:effectRef idx="2">
+            <a:schemeClr val="accent1"/>
+          </a:effectRef>
+          <a:fontRef idx="minor">
+            <a:schemeClr val="lt1"/>
+          </a:fontRef>
+        </p:style>
+        <p:txBody>
+          <a:bodyPr rtlCol="0" anchor="ctr"/>
+          <a:lstStyle/>
+          <a:p>
+            <a:pPr algn="ctr"/>
+          </a:p>
+        </p:txBody>
+      </p:sp>
+      <p:sp>
+        <p:nvSpPr>
+          <p:cNvPr id="14" name="TextBox 13"/>
           <p:cNvSpPr txBox="1"/>
           <p:nvPr/>
         </p:nvSpPr>
         <p:spPr>
           <a:xfrm>
-            <a:off x="548640" y="1554480"/>
-            <a:ext cx="11094415" cy="498348"/>
+            <a:off x="777240" y="1554480"/>
+            <a:ext cx="10865815" cy="498348"/>
           </a:xfrm>
           <a:prstGeom prst="rect">
             <a:avLst/>
@@ -23634,7 +26023,7 @@
       </p:sp>
       <p:sp>
         <p:nvSpPr>
-          <p:cNvPr id="12" name="Oval 11"/>
+          <p:cNvPr id="15" name="Oval 14"/>
           <p:cNvSpPr/>
           <p:nvPr/>
         </p:nvSpPr>
@@ -23687,7 +26076,7 @@
       </p:sp>
       <p:sp>
         <p:nvSpPr>
-          <p:cNvPr id="13" name="TextBox 12"/>
+          <p:cNvPr id="16" name="TextBox 15"/>
           <p:cNvSpPr txBox="1"/>
           <p:nvPr/>
         </p:nvSpPr>
@@ -23721,7 +26110,7 @@
       </p:sp>
       <p:sp>
         <p:nvSpPr>
-          <p:cNvPr id="14" name="Oval 13"/>
+          <p:cNvPr id="17" name="Oval 16"/>
           <p:cNvSpPr/>
           <p:nvPr/>
         </p:nvSpPr>
@@ -23774,7 +26163,7 @@
       </p:sp>
       <p:sp>
         <p:nvSpPr>
-          <p:cNvPr id="15" name="TextBox 14"/>
+          <p:cNvPr id="18" name="TextBox 17"/>
           <p:cNvSpPr txBox="1"/>
           <p:nvPr/>
         </p:nvSpPr>
@@ -24189,14 +26578,177 @@
       </p:pic>
       <p:sp>
         <p:nvSpPr>
-          <p:cNvPr id="11" name="TextBox 10"/>
+          <p:cNvPr id="11" name="Rounded Rectangle 10"/>
+          <p:cNvSpPr/>
+          <p:nvPr/>
+        </p:nvSpPr>
+        <p:spPr>
+          <a:xfrm>
+            <a:off x="411479" y="1444752"/>
+            <a:ext cx="11368735" cy="4800600"/>
+          </a:xfrm>
+          <a:prstGeom prst="roundRect">
+            <a:avLst>
+              <a:gd name="adj" fmla="val 4000"/>
+            </a:avLst>
+          </a:prstGeom>
+          <a:solidFill>
+            <a:srgbClr val="FFFFFF">
+              <a:alpha val="84000"/>
+            </a:srgbClr>
+          </a:solidFill>
+          <a:ln w="19050">
+            <a:solidFill>
+              <a:srgbClr val="FFFFFF"/>
+            </a:solidFill>
+          </a:ln>
+          <a:effectLst>
+            <a:outerShdw blurRad="203200" dist="50800" dir="5400000" algn="t" rotWithShape="0">
+              <a:srgbClr val="1A2340">
+                <a:alpha val="20000"/>
+              </a:srgbClr>
+            </a:outerShdw>
+          </a:effectLst>
+        </p:spPr>
+        <p:style>
+          <a:lnRef idx="1">
+            <a:schemeClr val="accent1"/>
+          </a:lnRef>
+          <a:fillRef idx="3">
+            <a:schemeClr val="accent1"/>
+          </a:fillRef>
+          <a:effectRef idx="2">
+            <a:schemeClr val="accent1"/>
+          </a:effectRef>
+          <a:fontRef idx="minor">
+            <a:schemeClr val="lt1"/>
+          </a:fontRef>
+        </p:style>
+        <p:txBody>
+          <a:bodyPr rtlCol="0" anchor="ctr"/>
+          <a:lstStyle/>
+          <a:p>
+            <a:pPr algn="ctr"/>
+          </a:p>
+        </p:txBody>
+      </p:sp>
+      <p:sp>
+        <p:nvSpPr>
+          <p:cNvPr id="12" name="Rounded Rectangle 11"/>
+          <p:cNvSpPr/>
+          <p:nvPr/>
+        </p:nvSpPr>
+        <p:spPr>
+          <a:xfrm>
+            <a:off x="731519" y="1508760"/>
+            <a:ext cx="10728655" cy="32004"/>
+          </a:xfrm>
+          <a:prstGeom prst="roundRect">
+            <a:avLst>
+              <a:gd name="adj" fmla="val 50000"/>
+            </a:avLst>
+          </a:prstGeom>
+          <a:solidFill>
+            <a:srgbClr val="FFFFFF">
+              <a:alpha val="85000"/>
+            </a:srgbClr>
+          </a:solidFill>
+          <a:ln>
+            <a:noFill/>
+          </a:ln>
+          <a:effectLst/>
+        </p:spPr>
+        <p:style>
+          <a:lnRef idx="1">
+            <a:schemeClr val="accent1"/>
+          </a:lnRef>
+          <a:fillRef idx="3">
+            <a:schemeClr val="accent1"/>
+          </a:fillRef>
+          <a:effectRef idx="2">
+            <a:schemeClr val="accent1"/>
+          </a:effectRef>
+          <a:fontRef idx="minor">
+            <a:schemeClr val="lt1"/>
+          </a:fontRef>
+        </p:style>
+        <p:txBody>
+          <a:bodyPr rtlCol="0" anchor="ctr"/>
+          <a:lstStyle/>
+          <a:p>
+            <a:pPr algn="ctr"/>
+          </a:p>
+        </p:txBody>
+      </p:sp>
+      <p:sp>
+        <p:nvSpPr>
+          <p:cNvPr id="13" name="Rounded Rectangle 12"/>
+          <p:cNvSpPr/>
+          <p:nvPr/>
+        </p:nvSpPr>
+        <p:spPr>
+          <a:xfrm>
+            <a:off x="548640" y="1591056"/>
+            <a:ext cx="64008" cy="594360"/>
+          </a:xfrm>
+          <a:prstGeom prst="roundRect">
+            <a:avLst>
+              <a:gd name="adj" fmla="val 50000"/>
+            </a:avLst>
+          </a:prstGeom>
+          <a:solidFill>
+            <a:srgbClr val="8D6A2A"/>
+          </a:solidFill>
+          <a:ln>
+            <a:noFill/>
+          </a:ln>
+          <a:effectLst>
+            <a:outerShdw blurRad="203200" dist="50800" dir="5400000" algn="t" rotWithShape="0">
+              <a:srgbClr val="1A2340">
+                <a:alpha val="20000"/>
+              </a:srgbClr>
+            </a:outerShdw>
+          </a:effectLst>
+          <a:scene3d>
+            <a:camera prst="orthographicFront"/>
+            <a:lightRig rig="threePt" dir="t"/>
+          </a:scene3d>
+          <a:sp3d>
+            <a:bevelT w="44450" h="25400" prst="softRound"/>
+          </a:sp3d>
+        </p:spPr>
+        <p:style>
+          <a:lnRef idx="1">
+            <a:schemeClr val="accent1"/>
+          </a:lnRef>
+          <a:fillRef idx="3">
+            <a:schemeClr val="accent1"/>
+          </a:fillRef>
+          <a:effectRef idx="2">
+            <a:schemeClr val="accent1"/>
+          </a:effectRef>
+          <a:fontRef idx="minor">
+            <a:schemeClr val="lt1"/>
+          </a:fontRef>
+        </p:style>
+        <p:txBody>
+          <a:bodyPr rtlCol="0" anchor="ctr"/>
+          <a:lstStyle/>
+          <a:p>
+            <a:pPr algn="ctr"/>
+          </a:p>
+        </p:txBody>
+      </p:sp>
+      <p:sp>
+        <p:nvSpPr>
+          <p:cNvPr id="14" name="TextBox 13"/>
           <p:cNvSpPr txBox="1"/>
           <p:nvPr/>
         </p:nvSpPr>
         <p:spPr>
           <a:xfrm>
-            <a:off x="548640" y="1554480"/>
-            <a:ext cx="11094415" cy="795528"/>
+            <a:off x="777240" y="1554480"/>
+            <a:ext cx="10865815" cy="795528"/>
           </a:xfrm>
           <a:prstGeom prst="rect">
             <a:avLst/>
@@ -24228,7 +26780,7 @@
       </p:sp>
       <p:graphicFrame>
         <p:nvGraphicFramePr>
-          <p:cNvPr id="12" name="Table 11"/>
+          <p:cNvPr id="15" name="Table 14"/>
           <p:cNvGraphicFramePr>
             <a:graphicFrameLocks noGrp="1"/>
           </p:cNvGraphicFramePr>
@@ -25087,14 +27639,177 @@
       </p:pic>
       <p:sp>
         <p:nvSpPr>
-          <p:cNvPr id="11" name="TextBox 10"/>
+          <p:cNvPr id="11" name="Rounded Rectangle 10"/>
+          <p:cNvSpPr/>
+          <p:nvPr/>
+        </p:nvSpPr>
+        <p:spPr>
+          <a:xfrm>
+            <a:off x="411479" y="1444752"/>
+            <a:ext cx="11368735" cy="4800600"/>
+          </a:xfrm>
+          <a:prstGeom prst="roundRect">
+            <a:avLst>
+              <a:gd name="adj" fmla="val 4000"/>
+            </a:avLst>
+          </a:prstGeom>
+          <a:solidFill>
+            <a:srgbClr val="FFFFFF">
+              <a:alpha val="84000"/>
+            </a:srgbClr>
+          </a:solidFill>
+          <a:ln w="19050">
+            <a:solidFill>
+              <a:srgbClr val="FFFFFF"/>
+            </a:solidFill>
+          </a:ln>
+          <a:effectLst>
+            <a:outerShdw blurRad="203200" dist="50800" dir="5400000" algn="t" rotWithShape="0">
+              <a:srgbClr val="1A2340">
+                <a:alpha val="20000"/>
+              </a:srgbClr>
+            </a:outerShdw>
+          </a:effectLst>
+        </p:spPr>
+        <p:style>
+          <a:lnRef idx="1">
+            <a:schemeClr val="accent1"/>
+          </a:lnRef>
+          <a:fillRef idx="3">
+            <a:schemeClr val="accent1"/>
+          </a:fillRef>
+          <a:effectRef idx="2">
+            <a:schemeClr val="accent1"/>
+          </a:effectRef>
+          <a:fontRef idx="minor">
+            <a:schemeClr val="lt1"/>
+          </a:fontRef>
+        </p:style>
+        <p:txBody>
+          <a:bodyPr rtlCol="0" anchor="ctr"/>
+          <a:lstStyle/>
+          <a:p>
+            <a:pPr algn="ctr"/>
+          </a:p>
+        </p:txBody>
+      </p:sp>
+      <p:sp>
+        <p:nvSpPr>
+          <p:cNvPr id="12" name="Rounded Rectangle 11"/>
+          <p:cNvSpPr/>
+          <p:nvPr/>
+        </p:nvSpPr>
+        <p:spPr>
+          <a:xfrm>
+            <a:off x="731519" y="1508760"/>
+            <a:ext cx="10728655" cy="32004"/>
+          </a:xfrm>
+          <a:prstGeom prst="roundRect">
+            <a:avLst>
+              <a:gd name="adj" fmla="val 50000"/>
+            </a:avLst>
+          </a:prstGeom>
+          <a:solidFill>
+            <a:srgbClr val="FFFFFF">
+              <a:alpha val="85000"/>
+            </a:srgbClr>
+          </a:solidFill>
+          <a:ln>
+            <a:noFill/>
+          </a:ln>
+          <a:effectLst/>
+        </p:spPr>
+        <p:style>
+          <a:lnRef idx="1">
+            <a:schemeClr val="accent1"/>
+          </a:lnRef>
+          <a:fillRef idx="3">
+            <a:schemeClr val="accent1"/>
+          </a:fillRef>
+          <a:effectRef idx="2">
+            <a:schemeClr val="accent1"/>
+          </a:effectRef>
+          <a:fontRef idx="minor">
+            <a:schemeClr val="lt1"/>
+          </a:fontRef>
+        </p:style>
+        <p:txBody>
+          <a:bodyPr rtlCol="0" anchor="ctr"/>
+          <a:lstStyle/>
+          <a:p>
+            <a:pPr algn="ctr"/>
+          </a:p>
+        </p:txBody>
+      </p:sp>
+      <p:sp>
+        <p:nvSpPr>
+          <p:cNvPr id="13" name="Rounded Rectangle 12"/>
+          <p:cNvSpPr/>
+          <p:nvPr/>
+        </p:nvSpPr>
+        <p:spPr>
+          <a:xfrm>
+            <a:off x="548640" y="1591056"/>
+            <a:ext cx="64008" cy="2699765"/>
+          </a:xfrm>
+          <a:prstGeom prst="roundRect">
+            <a:avLst>
+              <a:gd name="adj" fmla="val 50000"/>
+            </a:avLst>
+          </a:prstGeom>
+          <a:solidFill>
+            <a:srgbClr val="8D6A2A"/>
+          </a:solidFill>
+          <a:ln>
+            <a:noFill/>
+          </a:ln>
+          <a:effectLst>
+            <a:outerShdw blurRad="203200" dist="50800" dir="5400000" algn="t" rotWithShape="0">
+              <a:srgbClr val="1A2340">
+                <a:alpha val="20000"/>
+              </a:srgbClr>
+            </a:outerShdw>
+          </a:effectLst>
+          <a:scene3d>
+            <a:camera prst="orthographicFront"/>
+            <a:lightRig rig="threePt" dir="t"/>
+          </a:scene3d>
+          <a:sp3d>
+            <a:bevelT w="44450" h="25400" prst="softRound"/>
+          </a:sp3d>
+        </p:spPr>
+        <p:style>
+          <a:lnRef idx="1">
+            <a:schemeClr val="accent1"/>
+          </a:lnRef>
+          <a:fillRef idx="3">
+            <a:schemeClr val="accent1"/>
+          </a:fillRef>
+          <a:effectRef idx="2">
+            <a:schemeClr val="accent1"/>
+          </a:effectRef>
+          <a:fontRef idx="minor">
+            <a:schemeClr val="lt1"/>
+          </a:fontRef>
+        </p:style>
+        <p:txBody>
+          <a:bodyPr rtlCol="0" anchor="ctr"/>
+          <a:lstStyle/>
+          <a:p>
+            <a:pPr algn="ctr"/>
+          </a:p>
+        </p:txBody>
+      </p:sp>
+      <p:sp>
+        <p:nvSpPr>
+          <p:cNvPr id="14" name="TextBox 13"/>
           <p:cNvSpPr txBox="1"/>
           <p:nvPr/>
         </p:nvSpPr>
         <p:spPr>
           <a:xfrm>
-            <a:off x="548640" y="1554480"/>
-            <a:ext cx="4480560" cy="4617720"/>
+            <a:off x="777240" y="1554480"/>
+            <a:ext cx="4251960" cy="4617720"/>
           </a:xfrm>
           <a:prstGeom prst="rect">
             <a:avLst/>
@@ -25167,7 +27882,7 @@
       </p:sp>
       <p:sp>
         <p:nvSpPr>
-          <p:cNvPr id="12" name="Oval 11"/>
+          <p:cNvPr id="15" name="Oval 14"/>
           <p:cNvSpPr/>
           <p:nvPr/>
         </p:nvSpPr>
@@ -25220,7 +27935,7 @@
       </p:sp>
       <p:sp>
         <p:nvSpPr>
-          <p:cNvPr id="13" name="TextBox 12"/>
+          <p:cNvPr id="16" name="TextBox 15"/>
           <p:cNvSpPr txBox="1"/>
           <p:nvPr/>
         </p:nvSpPr>
@@ -25254,7 +27969,7 @@
       </p:sp>
       <p:sp>
         <p:nvSpPr>
-          <p:cNvPr id="14" name="Oval 13"/>
+          <p:cNvPr id="17" name="Oval 16"/>
           <p:cNvSpPr/>
           <p:nvPr/>
         </p:nvSpPr>
@@ -25307,7 +28022,7 @@
       </p:sp>
       <p:sp>
         <p:nvSpPr>
-          <p:cNvPr id="15" name="TextBox 14"/>
+          <p:cNvPr id="18" name="TextBox 17"/>
           <p:cNvSpPr txBox="1"/>
           <p:nvPr/>
         </p:nvSpPr>
@@ -25341,7 +28056,7 @@
       </p:sp>
       <p:sp>
         <p:nvSpPr>
-          <p:cNvPr id="16" name="Oval 15"/>
+          <p:cNvPr id="19" name="Oval 18"/>
           <p:cNvSpPr/>
           <p:nvPr/>
         </p:nvSpPr>
@@ -25394,7 +28109,7 @@
       </p:sp>
       <p:sp>
         <p:nvSpPr>
-          <p:cNvPr id="17" name="TextBox 16"/>
+          <p:cNvPr id="20" name="TextBox 19"/>
           <p:cNvSpPr txBox="1"/>
           <p:nvPr/>
         </p:nvSpPr>
@@ -25428,7 +28143,7 @@
       </p:sp>
       <p:sp>
         <p:nvSpPr>
-          <p:cNvPr id="18" name="Oval 17"/>
+          <p:cNvPr id="21" name="Oval 20"/>
           <p:cNvSpPr/>
           <p:nvPr/>
         </p:nvSpPr>
@@ -25481,7 +28196,7 @@
       </p:sp>
       <p:sp>
         <p:nvSpPr>
-          <p:cNvPr id="19" name="TextBox 18"/>
+          <p:cNvPr id="22" name="TextBox 21"/>
           <p:cNvSpPr txBox="1"/>
           <p:nvPr/>
         </p:nvSpPr>
@@ -25515,7 +28230,7 @@
       </p:sp>
       <p:sp>
         <p:nvSpPr>
-          <p:cNvPr id="20" name="Oval 19"/>
+          <p:cNvPr id="23" name="Oval 22"/>
           <p:cNvSpPr/>
           <p:nvPr/>
         </p:nvSpPr>
@@ -25568,7 +28283,7 @@
       </p:sp>
       <p:sp>
         <p:nvSpPr>
-          <p:cNvPr id="21" name="TextBox 20"/>
+          <p:cNvPr id="24" name="TextBox 23"/>
           <p:cNvSpPr txBox="1"/>
           <p:nvPr/>
         </p:nvSpPr>
@@ -25983,14 +28698,177 @@
       </p:pic>
       <p:sp>
         <p:nvSpPr>
-          <p:cNvPr id="11" name="TextBox 10"/>
+          <p:cNvPr id="11" name="Rounded Rectangle 10"/>
+          <p:cNvSpPr/>
+          <p:nvPr/>
+        </p:nvSpPr>
+        <p:spPr>
+          <a:xfrm>
+            <a:off x="411479" y="1444752"/>
+            <a:ext cx="11368735" cy="4800600"/>
+          </a:xfrm>
+          <a:prstGeom prst="roundRect">
+            <a:avLst>
+              <a:gd name="adj" fmla="val 4000"/>
+            </a:avLst>
+          </a:prstGeom>
+          <a:solidFill>
+            <a:srgbClr val="FFFFFF">
+              <a:alpha val="84000"/>
+            </a:srgbClr>
+          </a:solidFill>
+          <a:ln w="19050">
+            <a:solidFill>
+              <a:srgbClr val="FFFFFF"/>
+            </a:solidFill>
+          </a:ln>
+          <a:effectLst>
+            <a:outerShdw blurRad="203200" dist="50800" dir="5400000" algn="t" rotWithShape="0">
+              <a:srgbClr val="1A2340">
+                <a:alpha val="20000"/>
+              </a:srgbClr>
+            </a:outerShdw>
+          </a:effectLst>
+        </p:spPr>
+        <p:style>
+          <a:lnRef idx="1">
+            <a:schemeClr val="accent1"/>
+          </a:lnRef>
+          <a:fillRef idx="3">
+            <a:schemeClr val="accent1"/>
+          </a:fillRef>
+          <a:effectRef idx="2">
+            <a:schemeClr val="accent1"/>
+          </a:effectRef>
+          <a:fontRef idx="minor">
+            <a:schemeClr val="lt1"/>
+          </a:fontRef>
+        </p:style>
+        <p:txBody>
+          <a:bodyPr rtlCol="0" anchor="ctr"/>
+          <a:lstStyle/>
+          <a:p>
+            <a:pPr algn="ctr"/>
+          </a:p>
+        </p:txBody>
+      </p:sp>
+      <p:sp>
+        <p:nvSpPr>
+          <p:cNvPr id="12" name="Rounded Rectangle 11"/>
+          <p:cNvSpPr/>
+          <p:nvPr/>
+        </p:nvSpPr>
+        <p:spPr>
+          <a:xfrm>
+            <a:off x="731519" y="1508760"/>
+            <a:ext cx="10728655" cy="32004"/>
+          </a:xfrm>
+          <a:prstGeom prst="roundRect">
+            <a:avLst>
+              <a:gd name="adj" fmla="val 50000"/>
+            </a:avLst>
+          </a:prstGeom>
+          <a:solidFill>
+            <a:srgbClr val="FFFFFF">
+              <a:alpha val="85000"/>
+            </a:srgbClr>
+          </a:solidFill>
+          <a:ln>
+            <a:noFill/>
+          </a:ln>
+          <a:effectLst/>
+        </p:spPr>
+        <p:style>
+          <a:lnRef idx="1">
+            <a:schemeClr val="accent1"/>
+          </a:lnRef>
+          <a:fillRef idx="3">
+            <a:schemeClr val="accent1"/>
+          </a:fillRef>
+          <a:effectRef idx="2">
+            <a:schemeClr val="accent1"/>
+          </a:effectRef>
+          <a:fontRef idx="minor">
+            <a:schemeClr val="lt1"/>
+          </a:fontRef>
+        </p:style>
+        <p:txBody>
+          <a:bodyPr rtlCol="0" anchor="ctr"/>
+          <a:lstStyle/>
+          <a:p>
+            <a:pPr algn="ctr"/>
+          </a:p>
+        </p:txBody>
+      </p:sp>
+      <p:sp>
+        <p:nvSpPr>
+          <p:cNvPr id="13" name="Rounded Rectangle 12"/>
+          <p:cNvSpPr/>
+          <p:nvPr/>
+        </p:nvSpPr>
+        <p:spPr>
+          <a:xfrm>
+            <a:off x="548640" y="1591056"/>
+            <a:ext cx="64008" cy="2553462"/>
+          </a:xfrm>
+          <a:prstGeom prst="roundRect">
+            <a:avLst>
+              <a:gd name="adj" fmla="val 50000"/>
+            </a:avLst>
+          </a:prstGeom>
+          <a:solidFill>
+            <a:srgbClr val="8D6A2A"/>
+          </a:solidFill>
+          <a:ln>
+            <a:noFill/>
+          </a:ln>
+          <a:effectLst>
+            <a:outerShdw blurRad="203200" dist="50800" dir="5400000" algn="t" rotWithShape="0">
+              <a:srgbClr val="1A2340">
+                <a:alpha val="20000"/>
+              </a:srgbClr>
+            </a:outerShdw>
+          </a:effectLst>
+          <a:scene3d>
+            <a:camera prst="orthographicFront"/>
+            <a:lightRig rig="threePt" dir="t"/>
+          </a:scene3d>
+          <a:sp3d>
+            <a:bevelT w="44450" h="25400" prst="softRound"/>
+          </a:sp3d>
+        </p:spPr>
+        <p:style>
+          <a:lnRef idx="1">
+            <a:schemeClr val="accent1"/>
+          </a:lnRef>
+          <a:fillRef idx="3">
+            <a:schemeClr val="accent1"/>
+          </a:fillRef>
+          <a:effectRef idx="2">
+            <a:schemeClr val="accent1"/>
+          </a:effectRef>
+          <a:fontRef idx="minor">
+            <a:schemeClr val="lt1"/>
+          </a:fontRef>
+        </p:style>
+        <p:txBody>
+          <a:bodyPr rtlCol="0" anchor="ctr"/>
+          <a:lstStyle/>
+          <a:p>
+            <a:pPr algn="ctr"/>
+          </a:p>
+        </p:txBody>
+      </p:sp>
+      <p:sp>
+        <p:nvSpPr>
+          <p:cNvPr id="14" name="TextBox 13"/>
           <p:cNvSpPr txBox="1"/>
           <p:nvPr/>
         </p:nvSpPr>
         <p:spPr>
           <a:xfrm>
-            <a:off x="548640" y="1554480"/>
-            <a:ext cx="4480560" cy="4617720"/>
+            <a:off x="777240" y="1554480"/>
+            <a:ext cx="4251960" cy="4617720"/>
           </a:xfrm>
           <a:prstGeom prst="rect">
             <a:avLst/>
@@ -26056,7 +28934,7 @@
       </p:sp>
       <p:sp>
         <p:nvSpPr>
-          <p:cNvPr id="12" name="Oval 11"/>
+          <p:cNvPr id="15" name="Oval 14"/>
           <p:cNvSpPr/>
           <p:nvPr/>
         </p:nvSpPr>
@@ -26109,7 +28987,7 @@
       </p:sp>
       <p:sp>
         <p:nvSpPr>
-          <p:cNvPr id="13" name="TextBox 12"/>
+          <p:cNvPr id="16" name="TextBox 15"/>
           <p:cNvSpPr txBox="1"/>
           <p:nvPr/>
         </p:nvSpPr>
@@ -26152,7 +29030,7 @@
       </p:sp>
       <p:sp>
         <p:nvSpPr>
-          <p:cNvPr id="14" name="Oval 13"/>
+          <p:cNvPr id="17" name="Oval 16"/>
           <p:cNvSpPr/>
           <p:nvPr/>
         </p:nvSpPr>
@@ -26205,7 +29083,7 @@
       </p:sp>
       <p:sp>
         <p:nvSpPr>
-          <p:cNvPr id="15" name="TextBox 14"/>
+          <p:cNvPr id="18" name="TextBox 17"/>
           <p:cNvSpPr txBox="1"/>
           <p:nvPr/>
         </p:nvSpPr>
